--- a/docs/hpo_guide.pptx
+++ b/docs/hpo_guide.pptx
@@ -5,16 +5,16 @@
     <p:sldMasterId id="2147483648" r:id="rId1"/>
   </p:sldMasterIdLst>
   <p:sldIdLst>
-    <p:sldId id="256" r:id="rId7"/>
-    <p:sldId id="257" r:id="rId8"/>
-    <p:sldId id="258" r:id="rId9"/>
-    <p:sldId id="259" r:id="rId10"/>
-    <p:sldId id="260" r:id="rId11"/>
-    <p:sldId id="261" r:id="rId12"/>
-    <p:sldId id="262" r:id="rId13"/>
-    <p:sldId id="263" r:id="rId14"/>
+    <p:sldId id="256" r:id="rId2"/>
+    <p:sldId id="257" r:id="rId3"/>
+    <p:sldId id="258" r:id="rId4"/>
+    <p:sldId id="259" r:id="rId5"/>
+    <p:sldId id="260" r:id="rId6"/>
+    <p:sldId id="261" r:id="rId7"/>
+    <p:sldId id="262" r:id="rId8"/>
+    <p:sldId id="263" r:id="rId9"/>
   </p:sldIdLst>
-  <p:sldSz cx="12188952" cy="6858000" type="screen4x3"/>
+  <p:sldSz cx="12188825" cy="6858000"/>
   <p:notesSz cx="6858000" cy="9144000"/>
   <p:defaultTextStyle>
     <a:defPPr>
@@ -111,6 +111,22 @@
       </a:defRPr>
     </a:lvl9pPr>
   </p:defaultTextStyle>
+  <p:extLst>
+    <p:ext uri="{EFAFB233-063F-42B5-8137-9DF3F51BA10A}">
+      <p15:sldGuideLst xmlns:p15="http://schemas.microsoft.com/office/powerpoint/2012/main">
+        <p15:guide id="1" orient="horz" pos="2160">
+          <p15:clr>
+            <a:srgbClr val="A4A3A4"/>
+          </p15:clr>
+        </p15:guide>
+        <p15:guide id="2" pos="2880">
+          <p15:clr>
+            <a:srgbClr val="A4A3A4"/>
+          </p15:clr>
+        </p15:guide>
+      </p15:sldGuideLst>
+    </p:ext>
+  </p:extLst>
 </p:presentation>
 </file>
 
@@ -152,10 +168,9 @@
           <a:lstStyle/>
           <a:p>
             <a:r>
-              <a:rPr lang="en-US" smtClean="0"/>
+              <a:rPr lang="en-US"/>
               <a:t>Click to edit Master title style</a:t>
             </a:r>
-            <a:endParaRPr lang="en-US"/>
           </a:p>
         </p:txBody>
       </p:sp>
@@ -271,10 +286,9 @@
           </a:lstStyle>
           <a:p>
             <a:r>
-              <a:rPr lang="en-US" smtClean="0"/>
+              <a:rPr lang="en-US"/>
               <a:t>Click to edit Master subtitle style</a:t>
             </a:r>
-            <a:endParaRPr lang="en-US"/>
           </a:p>
         </p:txBody>
       </p:sp>
@@ -295,7 +309,7 @@
           <a:p>
             <a:fld id="{5BCAD085-E8A6-8845-BD4E-CB4CCA059FC4}" type="datetimeFigureOut">
               <a:rPr lang="en-US" smtClean="0"/>
-              <a:t>1/27/13</a:t>
+              <a:t>4/30/2026</a:t>
             </a:fld>
             <a:endParaRPr lang="en-US"/>
           </a:p>
@@ -389,10 +403,9 @@
           <a:lstStyle/>
           <a:p>
             <a:r>
-              <a:rPr lang="en-US" smtClean="0"/>
+              <a:rPr lang="en-US"/>
               <a:t>Click to edit Master title style</a:t>
             </a:r>
-            <a:endParaRPr lang="en-US"/>
           </a:p>
         </p:txBody>
       </p:sp>
@@ -413,38 +426,37 @@
           <a:p>
             <a:pPr lvl="0"/>
             <a:r>
-              <a:rPr lang="en-US" smtClean="0"/>
+              <a:rPr lang="en-US"/>
               <a:t>Click to edit Master text styles</a:t>
             </a:r>
           </a:p>
           <a:p>
             <a:pPr lvl="1"/>
             <a:r>
-              <a:rPr lang="en-US" smtClean="0"/>
+              <a:rPr lang="en-US"/>
               <a:t>Second level</a:t>
             </a:r>
           </a:p>
           <a:p>
             <a:pPr lvl="2"/>
             <a:r>
-              <a:rPr lang="en-US" smtClean="0"/>
+              <a:rPr lang="en-US"/>
               <a:t>Third level</a:t>
             </a:r>
           </a:p>
           <a:p>
             <a:pPr lvl="3"/>
             <a:r>
-              <a:rPr lang="en-US" smtClean="0"/>
+              <a:rPr lang="en-US"/>
               <a:t>Fourth level</a:t>
             </a:r>
           </a:p>
           <a:p>
             <a:pPr lvl="4"/>
             <a:r>
-              <a:rPr lang="en-US" smtClean="0"/>
+              <a:rPr lang="en-US"/>
               <a:t>Fifth level</a:t>
             </a:r>
-            <a:endParaRPr lang="en-US"/>
           </a:p>
         </p:txBody>
       </p:sp>
@@ -465,7 +477,7 @@
           <a:p>
             <a:fld id="{5BCAD085-E8A6-8845-BD4E-CB4CCA059FC4}" type="datetimeFigureOut">
               <a:rPr lang="en-US" smtClean="0"/>
-              <a:t>1/27/13</a:t>
+              <a:t>4/30/2026</a:t>
             </a:fld>
             <a:endParaRPr lang="en-US"/>
           </a:p>
@@ -564,10 +576,9 @@
           <a:lstStyle/>
           <a:p>
             <a:r>
-              <a:rPr lang="en-US" smtClean="0"/>
+              <a:rPr lang="en-US"/>
               <a:t>Click to edit Master title style</a:t>
             </a:r>
-            <a:endParaRPr lang="en-US"/>
           </a:p>
         </p:txBody>
       </p:sp>
@@ -593,38 +604,37 @@
           <a:p>
             <a:pPr lvl="0"/>
             <a:r>
-              <a:rPr lang="en-US" smtClean="0"/>
+              <a:rPr lang="en-US"/>
               <a:t>Click to edit Master text styles</a:t>
             </a:r>
           </a:p>
           <a:p>
             <a:pPr lvl="1"/>
             <a:r>
-              <a:rPr lang="en-US" smtClean="0"/>
+              <a:rPr lang="en-US"/>
               <a:t>Second level</a:t>
             </a:r>
           </a:p>
           <a:p>
             <a:pPr lvl="2"/>
             <a:r>
-              <a:rPr lang="en-US" smtClean="0"/>
+              <a:rPr lang="en-US"/>
               <a:t>Third level</a:t>
             </a:r>
           </a:p>
           <a:p>
             <a:pPr lvl="3"/>
             <a:r>
-              <a:rPr lang="en-US" smtClean="0"/>
+              <a:rPr lang="en-US"/>
               <a:t>Fourth level</a:t>
             </a:r>
           </a:p>
           <a:p>
             <a:pPr lvl="4"/>
             <a:r>
-              <a:rPr lang="en-US" smtClean="0"/>
+              <a:rPr lang="en-US"/>
               <a:t>Fifth level</a:t>
             </a:r>
-            <a:endParaRPr lang="en-US"/>
           </a:p>
         </p:txBody>
       </p:sp>
@@ -645,7 +655,7 @@
           <a:p>
             <a:fld id="{5BCAD085-E8A6-8845-BD4E-CB4CCA059FC4}" type="datetimeFigureOut">
               <a:rPr lang="en-US" smtClean="0"/>
-              <a:t>1/27/13</a:t>
+              <a:t>4/30/2026</a:t>
             </a:fld>
             <a:endParaRPr lang="en-US"/>
           </a:p>
@@ -739,10 +749,9 @@
           <a:lstStyle/>
           <a:p>
             <a:r>
-              <a:rPr lang="en-US" smtClean="0"/>
+              <a:rPr lang="en-US"/>
               <a:t>Click to edit Master title style</a:t>
             </a:r>
-            <a:endParaRPr lang="en-US"/>
           </a:p>
         </p:txBody>
       </p:sp>
@@ -763,38 +772,37 @@
           <a:p>
             <a:pPr lvl="0"/>
             <a:r>
-              <a:rPr lang="en-US" smtClean="0"/>
+              <a:rPr lang="en-US"/>
               <a:t>Click to edit Master text styles</a:t>
             </a:r>
           </a:p>
           <a:p>
             <a:pPr lvl="1"/>
             <a:r>
-              <a:rPr lang="en-US" smtClean="0"/>
+              <a:rPr lang="en-US"/>
               <a:t>Second level</a:t>
             </a:r>
           </a:p>
           <a:p>
             <a:pPr lvl="2"/>
             <a:r>
-              <a:rPr lang="en-US" smtClean="0"/>
+              <a:rPr lang="en-US"/>
               <a:t>Third level</a:t>
             </a:r>
           </a:p>
           <a:p>
             <a:pPr lvl="3"/>
             <a:r>
-              <a:rPr lang="en-US" smtClean="0"/>
+              <a:rPr lang="en-US"/>
               <a:t>Fourth level</a:t>
             </a:r>
           </a:p>
           <a:p>
             <a:pPr lvl="4"/>
             <a:r>
-              <a:rPr lang="en-US" smtClean="0"/>
+              <a:rPr lang="en-US"/>
               <a:t>Fifth level</a:t>
             </a:r>
-            <a:endParaRPr lang="en-US"/>
           </a:p>
         </p:txBody>
       </p:sp>
@@ -815,7 +823,7 @@
           <a:p>
             <a:fld id="{5BCAD085-E8A6-8845-BD4E-CB4CCA059FC4}" type="datetimeFigureOut">
               <a:rPr lang="en-US" smtClean="0"/>
-              <a:t>1/27/13</a:t>
+              <a:t>4/30/2026</a:t>
             </a:fld>
             <a:endParaRPr lang="en-US"/>
           </a:p>
@@ -918,10 +926,9 @@
           </a:lstStyle>
           <a:p>
             <a:r>
-              <a:rPr lang="en-US" smtClean="0"/>
+              <a:rPr lang="en-US"/>
               <a:t>Click to edit Master title style</a:t>
             </a:r>
-            <a:endParaRPr lang="en-US"/>
           </a:p>
         </p:txBody>
       </p:sp>
@@ -1038,7 +1045,7 @@
           <a:p>
             <a:pPr lvl="0"/>
             <a:r>
-              <a:rPr lang="en-US" smtClean="0"/>
+              <a:rPr lang="en-US"/>
               <a:t>Click to edit Master text styles</a:t>
             </a:r>
           </a:p>
@@ -1061,7 +1068,7 @@
           <a:p>
             <a:fld id="{5BCAD085-E8A6-8845-BD4E-CB4CCA059FC4}" type="datetimeFigureOut">
               <a:rPr lang="en-US" smtClean="0"/>
-              <a:t>1/27/13</a:t>
+              <a:t>4/30/2026</a:t>
             </a:fld>
             <a:endParaRPr lang="en-US"/>
           </a:p>
@@ -1155,10 +1162,9 @@
           <a:lstStyle/>
           <a:p>
             <a:r>
-              <a:rPr lang="en-US" smtClean="0"/>
+              <a:rPr lang="en-US"/>
               <a:t>Click to edit Master title style</a:t>
             </a:r>
-            <a:endParaRPr lang="en-US"/>
           </a:p>
         </p:txBody>
       </p:sp>
@@ -1212,38 +1218,37 @@
           <a:p>
             <a:pPr lvl="0"/>
             <a:r>
-              <a:rPr lang="en-US" smtClean="0"/>
+              <a:rPr lang="en-US"/>
               <a:t>Click to edit Master text styles</a:t>
             </a:r>
           </a:p>
           <a:p>
             <a:pPr lvl="1"/>
             <a:r>
-              <a:rPr lang="en-US" smtClean="0"/>
+              <a:rPr lang="en-US"/>
               <a:t>Second level</a:t>
             </a:r>
           </a:p>
           <a:p>
             <a:pPr lvl="2"/>
             <a:r>
-              <a:rPr lang="en-US" smtClean="0"/>
+              <a:rPr lang="en-US"/>
               <a:t>Third level</a:t>
             </a:r>
           </a:p>
           <a:p>
             <a:pPr lvl="3"/>
             <a:r>
-              <a:rPr lang="en-US" smtClean="0"/>
+              <a:rPr lang="en-US"/>
               <a:t>Fourth level</a:t>
             </a:r>
           </a:p>
           <a:p>
             <a:pPr lvl="4"/>
             <a:r>
-              <a:rPr lang="en-US" smtClean="0"/>
+              <a:rPr lang="en-US"/>
               <a:t>Fifth level</a:t>
             </a:r>
-            <a:endParaRPr lang="en-US"/>
           </a:p>
         </p:txBody>
       </p:sp>
@@ -1297,38 +1302,37 @@
           <a:p>
             <a:pPr lvl="0"/>
             <a:r>
-              <a:rPr lang="en-US" smtClean="0"/>
+              <a:rPr lang="en-US"/>
               <a:t>Click to edit Master text styles</a:t>
             </a:r>
           </a:p>
           <a:p>
             <a:pPr lvl="1"/>
             <a:r>
-              <a:rPr lang="en-US" smtClean="0"/>
+              <a:rPr lang="en-US"/>
               <a:t>Second level</a:t>
             </a:r>
           </a:p>
           <a:p>
             <a:pPr lvl="2"/>
             <a:r>
-              <a:rPr lang="en-US" smtClean="0"/>
+              <a:rPr lang="en-US"/>
               <a:t>Third level</a:t>
             </a:r>
           </a:p>
           <a:p>
             <a:pPr lvl="3"/>
             <a:r>
-              <a:rPr lang="en-US" smtClean="0"/>
+              <a:rPr lang="en-US"/>
               <a:t>Fourth level</a:t>
             </a:r>
           </a:p>
           <a:p>
             <a:pPr lvl="4"/>
             <a:r>
-              <a:rPr lang="en-US" smtClean="0"/>
+              <a:rPr lang="en-US"/>
               <a:t>Fifth level</a:t>
             </a:r>
-            <a:endParaRPr lang="en-US"/>
           </a:p>
         </p:txBody>
       </p:sp>
@@ -1349,7 +1353,7 @@
           <a:p>
             <a:fld id="{5BCAD085-E8A6-8845-BD4E-CB4CCA059FC4}" type="datetimeFigureOut">
               <a:rPr lang="en-US" smtClean="0"/>
-              <a:t>1/27/13</a:t>
+              <a:t>4/30/2026</a:t>
             </a:fld>
             <a:endParaRPr lang="en-US"/>
           </a:p>
@@ -1447,10 +1451,9 @@
           </a:lstStyle>
           <a:p>
             <a:r>
-              <a:rPr lang="en-US" smtClean="0"/>
+              <a:rPr lang="en-US"/>
               <a:t>Click to edit Master title style</a:t>
             </a:r>
-            <a:endParaRPr lang="en-US"/>
           </a:p>
         </p:txBody>
       </p:sp>
@@ -1513,7 +1516,7 @@
           <a:p>
             <a:pPr lvl="0"/>
             <a:r>
-              <a:rPr lang="en-US" smtClean="0"/>
+              <a:rPr lang="en-US"/>
               <a:t>Click to edit Master text styles</a:t>
             </a:r>
           </a:p>
@@ -1569,38 +1572,37 @@
           <a:p>
             <a:pPr lvl="0"/>
             <a:r>
-              <a:rPr lang="en-US" smtClean="0"/>
+              <a:rPr lang="en-US"/>
               <a:t>Click to edit Master text styles</a:t>
             </a:r>
           </a:p>
           <a:p>
             <a:pPr lvl="1"/>
             <a:r>
-              <a:rPr lang="en-US" smtClean="0"/>
+              <a:rPr lang="en-US"/>
               <a:t>Second level</a:t>
             </a:r>
           </a:p>
           <a:p>
             <a:pPr lvl="2"/>
             <a:r>
-              <a:rPr lang="en-US" smtClean="0"/>
+              <a:rPr lang="en-US"/>
               <a:t>Third level</a:t>
             </a:r>
           </a:p>
           <a:p>
             <a:pPr lvl="3"/>
             <a:r>
-              <a:rPr lang="en-US" smtClean="0"/>
+              <a:rPr lang="en-US"/>
               <a:t>Fourth level</a:t>
             </a:r>
           </a:p>
           <a:p>
             <a:pPr lvl="4"/>
             <a:r>
-              <a:rPr lang="en-US" smtClean="0"/>
+              <a:rPr lang="en-US"/>
               <a:t>Fifth level</a:t>
             </a:r>
-            <a:endParaRPr lang="en-US"/>
           </a:p>
         </p:txBody>
       </p:sp>
@@ -1663,7 +1665,7 @@
           <a:p>
             <a:pPr lvl="0"/>
             <a:r>
-              <a:rPr lang="en-US" smtClean="0"/>
+              <a:rPr lang="en-US"/>
               <a:t>Click to edit Master text styles</a:t>
             </a:r>
           </a:p>
@@ -1719,38 +1721,37 @@
           <a:p>
             <a:pPr lvl="0"/>
             <a:r>
-              <a:rPr lang="en-US" smtClean="0"/>
+              <a:rPr lang="en-US"/>
               <a:t>Click to edit Master text styles</a:t>
             </a:r>
           </a:p>
           <a:p>
             <a:pPr lvl="1"/>
             <a:r>
-              <a:rPr lang="en-US" smtClean="0"/>
+              <a:rPr lang="en-US"/>
               <a:t>Second level</a:t>
             </a:r>
           </a:p>
           <a:p>
             <a:pPr lvl="2"/>
             <a:r>
-              <a:rPr lang="en-US" smtClean="0"/>
+              <a:rPr lang="en-US"/>
               <a:t>Third level</a:t>
             </a:r>
           </a:p>
           <a:p>
             <a:pPr lvl="3"/>
             <a:r>
-              <a:rPr lang="en-US" smtClean="0"/>
+              <a:rPr lang="en-US"/>
               <a:t>Fourth level</a:t>
             </a:r>
           </a:p>
           <a:p>
             <a:pPr lvl="4"/>
             <a:r>
-              <a:rPr lang="en-US" smtClean="0"/>
+              <a:rPr lang="en-US"/>
               <a:t>Fifth level</a:t>
             </a:r>
-            <a:endParaRPr lang="en-US"/>
           </a:p>
         </p:txBody>
       </p:sp>
@@ -1771,7 +1772,7 @@
           <a:p>
             <a:fld id="{5BCAD085-E8A6-8845-BD4E-CB4CCA059FC4}" type="datetimeFigureOut">
               <a:rPr lang="en-US" smtClean="0"/>
-              <a:t>1/27/13</a:t>
+              <a:t>4/30/2026</a:t>
             </a:fld>
             <a:endParaRPr lang="en-US"/>
           </a:p>
@@ -1865,10 +1866,9 @@
           <a:lstStyle/>
           <a:p>
             <a:r>
-              <a:rPr lang="en-US" smtClean="0"/>
+              <a:rPr lang="en-US"/>
               <a:t>Click to edit Master title style</a:t>
             </a:r>
-            <a:endParaRPr lang="en-US"/>
           </a:p>
         </p:txBody>
       </p:sp>
@@ -1889,7 +1889,7 @@
           <a:p>
             <a:fld id="{5BCAD085-E8A6-8845-BD4E-CB4CCA059FC4}" type="datetimeFigureOut">
               <a:rPr lang="en-US" smtClean="0"/>
-              <a:t>1/27/13</a:t>
+              <a:t>4/30/2026</a:t>
             </a:fld>
             <a:endParaRPr lang="en-US"/>
           </a:p>
@@ -1984,7 +1984,7 @@
           <a:p>
             <a:fld id="{5BCAD085-E8A6-8845-BD4E-CB4CCA059FC4}" type="datetimeFigureOut">
               <a:rPr lang="en-US" smtClean="0"/>
-              <a:t>1/27/13</a:t>
+              <a:t>4/30/2026</a:t>
             </a:fld>
             <a:endParaRPr lang="en-US"/>
           </a:p>
@@ -2087,10 +2087,9 @@
           </a:lstStyle>
           <a:p>
             <a:r>
-              <a:rPr lang="en-US" smtClean="0"/>
+              <a:rPr lang="en-US"/>
               <a:t>Click to edit Master title style</a:t>
             </a:r>
-            <a:endParaRPr lang="en-US"/>
           </a:p>
         </p:txBody>
       </p:sp>
@@ -2144,38 +2143,37 @@
           <a:p>
             <a:pPr lvl="0"/>
             <a:r>
-              <a:rPr lang="en-US" smtClean="0"/>
+              <a:rPr lang="en-US"/>
               <a:t>Click to edit Master text styles</a:t>
             </a:r>
           </a:p>
           <a:p>
             <a:pPr lvl="1"/>
             <a:r>
-              <a:rPr lang="en-US" smtClean="0"/>
+              <a:rPr lang="en-US"/>
               <a:t>Second level</a:t>
             </a:r>
           </a:p>
           <a:p>
             <a:pPr lvl="2"/>
             <a:r>
-              <a:rPr lang="en-US" smtClean="0"/>
+              <a:rPr lang="en-US"/>
               <a:t>Third level</a:t>
             </a:r>
           </a:p>
           <a:p>
             <a:pPr lvl="3"/>
             <a:r>
-              <a:rPr lang="en-US" smtClean="0"/>
+              <a:rPr lang="en-US"/>
               <a:t>Fourth level</a:t>
             </a:r>
           </a:p>
           <a:p>
             <a:pPr lvl="4"/>
             <a:r>
-              <a:rPr lang="en-US" smtClean="0"/>
+              <a:rPr lang="en-US"/>
               <a:t>Fifth level</a:t>
             </a:r>
-            <a:endParaRPr lang="en-US"/>
           </a:p>
         </p:txBody>
       </p:sp>
@@ -2238,7 +2236,7 @@
           <a:p>
             <a:pPr lvl="0"/>
             <a:r>
-              <a:rPr lang="en-US" smtClean="0"/>
+              <a:rPr lang="en-US"/>
               <a:t>Click to edit Master text styles</a:t>
             </a:r>
           </a:p>
@@ -2261,7 +2259,7 @@
           <a:p>
             <a:fld id="{5BCAD085-E8A6-8845-BD4E-CB4CCA059FC4}" type="datetimeFigureOut">
               <a:rPr lang="en-US" smtClean="0"/>
-              <a:t>1/27/13</a:t>
+              <a:t>4/30/2026</a:t>
             </a:fld>
             <a:endParaRPr lang="en-US"/>
           </a:p>
@@ -2364,10 +2362,9 @@
           </a:lstStyle>
           <a:p>
             <a:r>
-              <a:rPr lang="en-US" smtClean="0"/>
+              <a:rPr lang="en-US"/>
               <a:t>Click to edit Master title style</a:t>
             </a:r>
-            <a:endParaRPr lang="en-US"/>
           </a:p>
         </p:txBody>
       </p:sp>
@@ -2491,7 +2488,7 @@
           <a:p>
             <a:pPr lvl="0"/>
             <a:r>
-              <a:rPr lang="en-US" smtClean="0"/>
+              <a:rPr lang="en-US"/>
               <a:t>Click to edit Master text styles</a:t>
             </a:r>
           </a:p>
@@ -2514,7 +2511,7 @@
           <a:p>
             <a:fld id="{5BCAD085-E8A6-8845-BD4E-CB4CCA059FC4}" type="datetimeFigureOut">
               <a:rPr lang="en-US" smtClean="0"/>
-              <a:t>1/27/13</a:t>
+              <a:t>4/30/2026</a:t>
             </a:fld>
             <a:endParaRPr lang="en-US"/>
           </a:p>
@@ -2623,10 +2620,9 @@
           <a:lstStyle/>
           <a:p>
             <a:r>
-              <a:rPr lang="en-US" smtClean="0"/>
+              <a:rPr lang="en-US"/>
               <a:t>Click to edit Master title style</a:t>
             </a:r>
-            <a:endParaRPr lang="en-US"/>
           </a:p>
         </p:txBody>
       </p:sp>
@@ -2657,38 +2653,37 @@
           <a:p>
             <a:pPr lvl="0"/>
             <a:r>
-              <a:rPr lang="en-US" smtClean="0"/>
+              <a:rPr lang="en-US"/>
               <a:t>Click to edit Master text styles</a:t>
             </a:r>
           </a:p>
           <a:p>
             <a:pPr lvl="1"/>
             <a:r>
-              <a:rPr lang="en-US" smtClean="0"/>
+              <a:rPr lang="en-US"/>
               <a:t>Second level</a:t>
             </a:r>
           </a:p>
           <a:p>
             <a:pPr lvl="2"/>
             <a:r>
-              <a:rPr lang="en-US" smtClean="0"/>
+              <a:rPr lang="en-US"/>
               <a:t>Third level</a:t>
             </a:r>
           </a:p>
           <a:p>
             <a:pPr lvl="3"/>
             <a:r>
-              <a:rPr lang="en-US" smtClean="0"/>
+              <a:rPr lang="en-US"/>
               <a:t>Fourth level</a:t>
             </a:r>
           </a:p>
           <a:p>
             <a:pPr lvl="4"/>
             <a:r>
-              <a:rPr lang="en-US" smtClean="0"/>
+              <a:rPr lang="en-US"/>
               <a:t>Fifth level</a:t>
             </a:r>
-            <a:endParaRPr lang="en-US"/>
           </a:p>
         </p:txBody>
       </p:sp>
@@ -2727,7 +2722,7 @@
           <a:p>
             <a:fld id="{5BCAD085-E8A6-8845-BD4E-CB4CCA059FC4}" type="datetimeFigureOut">
               <a:rPr lang="en-US" smtClean="0"/>
-              <a:t>1/27/13</a:t>
+              <a:t>4/30/2026</a:t>
             </a:fld>
             <a:endParaRPr lang="en-US"/>
           </a:p>
@@ -3086,7 +3081,7 @@
 </file>
 
 <file path=ppt/slides/slide1.xml><?xml version="1.0" encoding="utf-8"?>
-<p:sld xmlns:a="http://schemas.openxmlformats.org/drawingml/2006/main" xmlns:p="http://schemas.openxmlformats.org/presentationml/2006/main" xmlns:r="http://schemas.openxmlformats.org/officeDocument/2006/relationships">
+<p:sld xmlns:a="http://schemas.openxmlformats.org/drawingml/2006/main" xmlns:r="http://schemas.openxmlformats.org/officeDocument/2006/relationships" xmlns:p="http://schemas.openxmlformats.org/presentationml/2006/main">
   <p:cSld>
     <p:bg>
       <p:bgPr>
@@ -3102,7 +3097,14 @@
         <p:cNvGrpSpPr/>
         <p:nvPr/>
       </p:nvGrpSpPr>
-      <p:grpSpPr/>
+      <p:grpSpPr>
+        <a:xfrm>
+          <a:off x="0" y="0"/>
+          <a:ext cx="0" cy="0"/>
+          <a:chOff x="0" y="0"/>
+          <a:chExt cx="0" cy="0"/>
+        </a:xfrm>
+      </p:grpSpPr>
       <p:sp>
         <p:nvSpPr>
           <p:cNvPr id="2" name="Rectangle 1"/>
@@ -3143,6 +3145,7 @@
           <a:lstStyle/>
           <a:p>
             <a:pPr algn="ctr"/>
+            <a:endParaRPr/>
           </a:p>
         </p:txBody>
       </p:sp>
@@ -3186,6 +3189,7 @@
           <a:lstStyle/>
           <a:p>
             <a:pPr algn="ctr"/>
+            <a:endParaRPr/>
           </a:p>
         </p:txBody>
       </p:sp>
@@ -3297,6 +3301,7 @@
           <a:lstStyle/>
           <a:p>
             <a:pPr algn="ctr"/>
+            <a:endParaRPr/>
           </a:p>
         </p:txBody>
       </p:sp>
@@ -3378,7 +3383,7 @@
 </file>
 
 <file path=ppt/slides/slide2.xml><?xml version="1.0" encoding="utf-8"?>
-<p:sld xmlns:a="http://schemas.openxmlformats.org/drawingml/2006/main" xmlns:p="http://schemas.openxmlformats.org/presentationml/2006/main" xmlns:r="http://schemas.openxmlformats.org/officeDocument/2006/relationships">
+<p:sld xmlns:a="http://schemas.openxmlformats.org/drawingml/2006/main" xmlns:r="http://schemas.openxmlformats.org/officeDocument/2006/relationships" xmlns:p="http://schemas.openxmlformats.org/presentationml/2006/main">
   <p:cSld>
     <p:bg>
       <p:bgPr>
@@ -3394,7 +3399,14 @@
         <p:cNvGrpSpPr/>
         <p:nvPr/>
       </p:nvGrpSpPr>
-      <p:grpSpPr/>
+      <p:grpSpPr>
+        <a:xfrm>
+          <a:off x="0" y="0"/>
+          <a:ext cx="0" cy="0"/>
+          <a:chOff x="0" y="0"/>
+          <a:chExt cx="0" cy="0"/>
+        </a:xfrm>
+      </p:grpSpPr>
       <p:sp>
         <p:nvSpPr>
           <p:cNvPr id="2" name="Rectangle 1"/>
@@ -3435,6 +3447,7 @@
           <a:lstStyle/>
           <a:p>
             <a:pPr algn="ctr"/>
+            <a:endParaRPr/>
           </a:p>
         </p:txBody>
       </p:sp>
@@ -3447,7 +3460,7 @@
         <p:spPr>
           <a:xfrm>
             <a:off x="502920" y="292608"/>
-            <a:ext cx="1554480" cy="237744"/>
+            <a:ext cx="1554480" cy="246221"/>
           </a:xfrm>
           <a:prstGeom prst="rect">
             <a:avLst/>
@@ -3462,11 +3475,7 @@
           <a:p>
             <a:pPr algn="ctr"/>
             <a:r>
-              <a:rPr sz="1000" b="1">
-                <a:solidFill>
-                  <a:srgbClr val="FFFFFF"/>
-                </a:solidFill>
-              </a:rPr>
+              <a:rPr sz="1000" b="1" dirty="0"/>
               <a:t>DIRECTORY</a:t>
             </a:r>
           </a:p>
@@ -3546,6 +3555,7 @@
           <a:lstStyle/>
           <a:p>
             <a:pPr algn="ctr"/>
+            <a:endParaRPr/>
           </a:p>
         </p:txBody>
       </p:sp>
@@ -3623,6 +3633,7 @@
           <a:lstStyle/>
           <a:p>
             <a:pPr algn="ctr"/>
+            <a:endParaRPr/>
           </a:p>
         </p:txBody>
       </p:sp>
@@ -3976,6 +3987,7 @@
           <a:lstStyle/>
           <a:p>
             <a:pPr algn="ctr"/>
+            <a:endParaRPr/>
           </a:p>
         </p:txBody>
       </p:sp>
@@ -4087,6 +4099,7 @@
           <a:lstStyle/>
           <a:p>
             <a:pPr algn="ctr"/>
+            <a:endParaRPr/>
           </a:p>
         </p:txBody>
       </p:sp>
@@ -4198,6 +4211,7 @@
           <a:lstStyle/>
           <a:p>
             <a:pPr algn="ctr"/>
+            <a:endParaRPr/>
           </a:p>
         </p:txBody>
       </p:sp>
@@ -4309,6 +4323,7 @@
           <a:lstStyle/>
           <a:p>
             <a:pPr algn="ctr"/>
+            <a:endParaRPr/>
           </a:p>
         </p:txBody>
       </p:sp>
@@ -4420,6 +4435,7 @@
           <a:lstStyle/>
           <a:p>
             <a:pPr algn="ctr"/>
+            <a:endParaRPr/>
           </a:p>
         </p:txBody>
       </p:sp>
@@ -4531,6 +4547,7 @@
           <a:lstStyle/>
           <a:p>
             <a:pPr algn="ctr"/>
+            <a:endParaRPr/>
           </a:p>
         </p:txBody>
       </p:sp>
@@ -4611,7 +4628,7 @@
 </file>
 
 <file path=ppt/slides/slide3.xml><?xml version="1.0" encoding="utf-8"?>
-<p:sld xmlns:a="http://schemas.openxmlformats.org/drawingml/2006/main" xmlns:p="http://schemas.openxmlformats.org/presentationml/2006/main" xmlns:r="http://schemas.openxmlformats.org/officeDocument/2006/relationships">
+<p:sld xmlns:a="http://schemas.openxmlformats.org/drawingml/2006/main" xmlns:r="http://schemas.openxmlformats.org/officeDocument/2006/relationships" xmlns:p="http://schemas.openxmlformats.org/presentationml/2006/main">
   <p:cSld>
     <p:bg>
       <p:bgPr>
@@ -4627,7 +4644,14 @@
         <p:cNvGrpSpPr/>
         <p:nvPr/>
       </p:nvGrpSpPr>
-      <p:grpSpPr/>
+      <p:grpSpPr>
+        <a:xfrm>
+          <a:off x="0" y="0"/>
+          <a:ext cx="0" cy="0"/>
+          <a:chOff x="0" y="0"/>
+          <a:chExt cx="0" cy="0"/>
+        </a:xfrm>
+      </p:grpSpPr>
       <p:sp>
         <p:nvSpPr>
           <p:cNvPr id="2" name="Rectangle 1"/>
@@ -4668,6 +4692,7 @@
           <a:lstStyle/>
           <a:p>
             <a:pPr algn="ctr"/>
+            <a:endParaRPr/>
           </a:p>
         </p:txBody>
       </p:sp>
@@ -4680,7 +4705,7 @@
         <p:spPr>
           <a:xfrm>
             <a:off x="502920" y="292608"/>
-            <a:ext cx="1554480" cy="237744"/>
+            <a:ext cx="1554480" cy="246221"/>
           </a:xfrm>
           <a:prstGeom prst="rect">
             <a:avLst/>
@@ -4695,11 +4720,7 @@
           <a:p>
             <a:pPr algn="ctr"/>
             <a:r>
-              <a:rPr sz="1000" b="1">
-                <a:solidFill>
-                  <a:srgbClr val="FFFFFF"/>
-                </a:solidFill>
-              </a:rPr>
+              <a:rPr sz="1000" b="1" dirty="0"/>
               <a:t>VARIABLES</a:t>
             </a:r>
           </a:p>
@@ -4779,6 +4800,7 @@
           <a:lstStyle/>
           <a:p>
             <a:pPr algn="ctr"/>
+            <a:endParaRPr/>
           </a:p>
         </p:txBody>
       </p:sp>
@@ -4822,6 +4844,7 @@
           <a:lstStyle/>
           <a:p>
             <a:pPr algn="ctr"/>
+            <a:endParaRPr/>
           </a:p>
         </p:txBody>
       </p:sp>
@@ -4865,6 +4888,7 @@
           <a:lstStyle/>
           <a:p>
             <a:pPr algn="ctr"/>
+            <a:endParaRPr/>
           </a:p>
         </p:txBody>
       </p:sp>
@@ -4877,7 +4901,7 @@
         <p:spPr>
           <a:xfrm>
             <a:off x="566928" y="1179576"/>
-            <a:ext cx="5486400" cy="237744"/>
+            <a:ext cx="5486400" cy="292388"/>
           </a:xfrm>
           <a:prstGeom prst="rect">
             <a:avLst/>
@@ -4892,11 +4916,7 @@
           <a:p>
             <a:pPr algn="l"/>
             <a:r>
-              <a:rPr sz="1300" b="1">
-                <a:solidFill>
-                  <a:srgbClr val="FFFFFF"/>
-                </a:solidFill>
-              </a:rPr>
+              <a:rPr sz="1300" b="1" dirty="0"/>
               <a:t>EXP_NAME</a:t>
             </a:r>
           </a:p>
@@ -4942,6 +4962,7 @@
           <a:lstStyle/>
           <a:p>
             <a:pPr algn="ctr"/>
+            <a:endParaRPr/>
           </a:p>
         </p:txBody>
       </p:sp>
@@ -5087,6 +5108,7 @@
           <a:lstStyle/>
           <a:p>
             <a:pPr algn="ctr"/>
+            <a:endParaRPr/>
           </a:p>
         </p:txBody>
       </p:sp>
@@ -5130,6 +5152,7 @@
           <a:lstStyle/>
           <a:p>
             <a:pPr algn="ctr"/>
+            <a:endParaRPr/>
           </a:p>
         </p:txBody>
       </p:sp>
@@ -5142,7 +5165,7 @@
         <p:spPr>
           <a:xfrm>
             <a:off x="6464808" y="1179576"/>
-            <a:ext cx="5486400" cy="237744"/>
+            <a:ext cx="5486400" cy="292388"/>
           </a:xfrm>
           <a:prstGeom prst="rect">
             <a:avLst/>
@@ -5157,11 +5180,7 @@
           <a:p>
             <a:pPr algn="l"/>
             <a:r>
-              <a:rPr sz="1300" b="1">
-                <a:solidFill>
-                  <a:srgbClr val="FFFFFF"/>
-                </a:solidFill>
-              </a:rPr>
+              <a:rPr sz="1300" b="1" dirty="0"/>
               <a:t>HPO_RUN_NAME</a:t>
             </a:r>
           </a:p>
@@ -5207,6 +5226,7 @@
           <a:lstStyle/>
           <a:p>
             <a:pPr algn="ctr"/>
+            <a:endParaRPr/>
           </a:p>
         </p:txBody>
       </p:sp>
@@ -5352,6 +5372,7 @@
           <a:lstStyle/>
           <a:p>
             <a:pPr algn="ctr"/>
+            <a:endParaRPr/>
           </a:p>
         </p:txBody>
       </p:sp>
@@ -5395,6 +5416,7 @@
           <a:lstStyle/>
           <a:p>
             <a:pPr algn="ctr"/>
+            <a:endParaRPr/>
           </a:p>
         </p:txBody>
       </p:sp>
@@ -5407,7 +5429,7 @@
         <p:spPr>
           <a:xfrm>
             <a:off x="566928" y="3008376"/>
-            <a:ext cx="5486400" cy="237744"/>
+            <a:ext cx="5486400" cy="292388"/>
           </a:xfrm>
           <a:prstGeom prst="rect">
             <a:avLst/>
@@ -5422,11 +5444,7 @@
           <a:p>
             <a:pPr algn="l"/>
             <a:r>
-              <a:rPr sz="1300" b="1">
-                <a:solidFill>
-                  <a:srgbClr val="FFFFFF"/>
-                </a:solidFill>
-              </a:rPr>
+              <a:rPr sz="1300" b="1"/>
               <a:t>TUNING_METHOD</a:t>
             </a:r>
           </a:p>
@@ -5472,6 +5490,7 @@
           <a:lstStyle/>
           <a:p>
             <a:pPr algn="ctr"/>
+            <a:endParaRPr/>
           </a:p>
         </p:txBody>
       </p:sp>
@@ -5617,6 +5636,7 @@
           <a:lstStyle/>
           <a:p>
             <a:pPr algn="ctr"/>
+            <a:endParaRPr/>
           </a:p>
         </p:txBody>
       </p:sp>
@@ -5660,6 +5680,7 @@
           <a:lstStyle/>
           <a:p>
             <a:pPr algn="ctr"/>
+            <a:endParaRPr/>
           </a:p>
         </p:txBody>
       </p:sp>
@@ -5672,7 +5693,7 @@
         <p:spPr>
           <a:xfrm>
             <a:off x="6464808" y="3008376"/>
-            <a:ext cx="5486400" cy="237744"/>
+            <a:ext cx="5486400" cy="292388"/>
           </a:xfrm>
           <a:prstGeom prst="rect">
             <a:avLst/>
@@ -5687,11 +5708,7 @@
           <a:p>
             <a:pPr algn="l"/>
             <a:r>
-              <a:rPr sz="1300" b="1">
-                <a:solidFill>
-                  <a:srgbClr val="FFFFFF"/>
-                </a:solidFill>
-              </a:rPr>
+              <a:rPr sz="1300" b="1"/>
               <a:t>TUNING_EPOCHS</a:t>
             </a:r>
           </a:p>
@@ -5737,6 +5754,7 @@
           <a:lstStyle/>
           <a:p>
             <a:pPr algn="ctr"/>
+            <a:endParaRPr/>
           </a:p>
         </p:txBody>
       </p:sp>
@@ -5882,6 +5900,7 @@
           <a:lstStyle/>
           <a:p>
             <a:pPr algn="ctr"/>
+            <a:endParaRPr/>
           </a:p>
         </p:txBody>
       </p:sp>
@@ -5925,6 +5944,7 @@
           <a:lstStyle/>
           <a:p>
             <a:pPr algn="ctr"/>
+            <a:endParaRPr/>
           </a:p>
         </p:txBody>
       </p:sp>
@@ -5937,7 +5957,7 @@
         <p:spPr>
           <a:xfrm>
             <a:off x="566928" y="4837176"/>
-            <a:ext cx="5486400" cy="237744"/>
+            <a:ext cx="5486400" cy="292388"/>
           </a:xfrm>
           <a:prstGeom prst="rect">
             <a:avLst/>
@@ -5952,11 +5972,7 @@
           <a:p>
             <a:pPr algn="l"/>
             <a:r>
-              <a:rPr sz="1300" b="1">
-                <a:solidFill>
-                  <a:srgbClr val="FFFFFF"/>
-                </a:solidFill>
-              </a:rPr>
+              <a:rPr sz="1300" b="1"/>
               <a:t>TUNING_TRIALS</a:t>
             </a:r>
           </a:p>
@@ -6002,6 +6018,7 @@
           <a:lstStyle/>
           <a:p>
             <a:pPr algn="ctr"/>
+            <a:endParaRPr/>
           </a:p>
         </p:txBody>
       </p:sp>
@@ -6147,6 +6164,7 @@
           <a:lstStyle/>
           <a:p>
             <a:pPr algn="ctr"/>
+            <a:endParaRPr/>
           </a:p>
         </p:txBody>
       </p:sp>
@@ -6190,6 +6208,7 @@
           <a:lstStyle/>
           <a:p>
             <a:pPr algn="ctr"/>
+            <a:endParaRPr/>
           </a:p>
         </p:txBody>
       </p:sp>
@@ -6202,7 +6221,7 @@
         <p:spPr>
           <a:xfrm>
             <a:off x="6464808" y="4837176"/>
-            <a:ext cx="5486400" cy="237744"/>
+            <a:ext cx="5486400" cy="292388"/>
           </a:xfrm>
           <a:prstGeom prst="rect">
             <a:avLst/>
@@ -6217,11 +6236,7 @@
           <a:p>
             <a:pPr algn="l"/>
             <a:r>
-              <a:rPr sz="1300" b="1">
-                <a:solidFill>
-                  <a:srgbClr val="FFFFFF"/>
-                </a:solidFill>
-              </a:rPr>
+              <a:rPr sz="1300" b="1"/>
               <a:t>SEARCH_SPACE_YAML</a:t>
             </a:r>
           </a:p>
@@ -6267,6 +6282,7 @@
           <a:lstStyle/>
           <a:p>
             <a:pPr algn="ctr"/>
+            <a:endParaRPr/>
           </a:p>
         </p:txBody>
       </p:sp>
@@ -6381,7 +6397,7 @@
 </file>
 
 <file path=ppt/slides/slide4.xml><?xml version="1.0" encoding="utf-8"?>
-<p:sld xmlns:a="http://schemas.openxmlformats.org/drawingml/2006/main" xmlns:p="http://schemas.openxmlformats.org/presentationml/2006/main" xmlns:r="http://schemas.openxmlformats.org/officeDocument/2006/relationships">
+<p:sld xmlns:a="http://schemas.openxmlformats.org/drawingml/2006/main" xmlns:r="http://schemas.openxmlformats.org/officeDocument/2006/relationships" xmlns:p="http://schemas.openxmlformats.org/presentationml/2006/main">
   <p:cSld>
     <p:bg>
       <p:bgPr>
@@ -6397,7 +6413,14 @@
         <p:cNvGrpSpPr/>
         <p:nvPr/>
       </p:nvGrpSpPr>
-      <p:grpSpPr/>
+      <p:grpSpPr>
+        <a:xfrm>
+          <a:off x="0" y="0"/>
+          <a:ext cx="0" cy="0"/>
+          <a:chOff x="0" y="0"/>
+          <a:chExt cx="0" cy="0"/>
+        </a:xfrm>
+      </p:grpSpPr>
       <p:sp>
         <p:nvSpPr>
           <p:cNvPr id="2" name="Rectangle 1"/>
@@ -6438,6 +6461,7 @@
           <a:lstStyle/>
           <a:p>
             <a:pPr algn="ctr"/>
+            <a:endParaRPr/>
           </a:p>
         </p:txBody>
       </p:sp>
@@ -6450,7 +6474,7 @@
         <p:spPr>
           <a:xfrm>
             <a:off x="502920" y="292608"/>
-            <a:ext cx="1554480" cy="237744"/>
+            <a:ext cx="1554480" cy="246221"/>
           </a:xfrm>
           <a:prstGeom prst="rect">
             <a:avLst/>
@@ -6465,11 +6489,7 @@
           <a:p>
             <a:pPr algn="ctr"/>
             <a:r>
-              <a:rPr sz="1000" b="1">
-                <a:solidFill>
-                  <a:srgbClr val="FFFFFF"/>
-                </a:solidFill>
-              </a:rPr>
+              <a:rPr sz="1000" b="1" dirty="0"/>
               <a:t>SEARCH SPACE</a:t>
             </a:r>
           </a:p>
@@ -6549,6 +6569,7 @@
           <a:lstStyle/>
           <a:p>
             <a:pPr algn="ctr"/>
+            <a:endParaRPr/>
           </a:p>
         </p:txBody>
       </p:sp>
@@ -6592,6 +6613,7 @@
           <a:lstStyle/>
           <a:p>
             <a:pPr algn="ctr"/>
+            <a:endParaRPr/>
           </a:p>
         </p:txBody>
       </p:sp>
@@ -6604,7 +6626,7 @@
         <p:spPr>
           <a:xfrm>
             <a:off x="594360" y="1078992"/>
-            <a:ext cx="5120640" cy="237744"/>
+            <a:ext cx="5120640" cy="292388"/>
           </a:xfrm>
           <a:prstGeom prst="rect">
             <a:avLst/>
@@ -6619,11 +6641,7 @@
           <a:p>
             <a:pPr algn="l"/>
             <a:r>
-              <a:rPr sz="1300" b="1">
-                <a:solidFill>
-                  <a:srgbClr val="FFFFFF"/>
-                </a:solidFill>
-              </a:rPr>
+              <a:rPr sz="1300" b="1"/>
               <a:t>Grid Search 용</a:t>
             </a:r>
           </a:p>
@@ -6669,6 +6687,7 @@
           <a:lstStyle/>
           <a:p>
             <a:pPr algn="ctr"/>
+            <a:endParaRPr/>
           </a:p>
         </p:txBody>
       </p:sp>
@@ -6712,6 +6731,7 @@
           <a:lstStyle/>
           <a:p>
             <a:pPr algn="ctr"/>
+            <a:endParaRPr/>
           </a:p>
         </p:txBody>
       </p:sp>
@@ -6857,6 +6877,7 @@
           <a:lstStyle/>
           <a:p>
             <a:pPr algn="ctr"/>
+            <a:endParaRPr/>
           </a:p>
         </p:txBody>
       </p:sp>
@@ -6900,6 +6921,7 @@
           <a:lstStyle/>
           <a:p>
             <a:pPr algn="ctr"/>
+            <a:endParaRPr/>
           </a:p>
         </p:txBody>
       </p:sp>
@@ -7045,6 +7067,7 @@
           <a:lstStyle/>
           <a:p>
             <a:pPr algn="ctr"/>
+            <a:endParaRPr/>
           </a:p>
         </p:txBody>
       </p:sp>
@@ -7088,6 +7111,7 @@
           <a:lstStyle/>
           <a:p>
             <a:pPr algn="ctr"/>
+            <a:endParaRPr/>
           </a:p>
         </p:txBody>
       </p:sp>
@@ -7233,6 +7257,7 @@
           <a:lstStyle/>
           <a:p>
             <a:pPr algn="ctr"/>
+            <a:endParaRPr/>
           </a:p>
         </p:txBody>
       </p:sp>
@@ -7310,6 +7335,7 @@
           <a:lstStyle/>
           <a:p>
             <a:pPr algn="ctr"/>
+            <a:endParaRPr/>
           </a:p>
         </p:txBody>
       </p:sp>
@@ -7353,6 +7379,7 @@
           <a:lstStyle/>
           <a:p>
             <a:pPr algn="ctr"/>
+            <a:endParaRPr/>
           </a:p>
         </p:txBody>
       </p:sp>
@@ -7498,6 +7525,7 @@
           <a:lstStyle/>
           <a:p>
             <a:pPr algn="ctr"/>
+            <a:endParaRPr/>
           </a:p>
         </p:txBody>
       </p:sp>
@@ -7541,6 +7569,7 @@
           <a:lstStyle/>
           <a:p>
             <a:pPr algn="ctr"/>
+            <a:endParaRPr/>
           </a:p>
         </p:txBody>
       </p:sp>
@@ -7686,6 +7715,7 @@
           <a:lstStyle/>
           <a:p>
             <a:pPr algn="ctr"/>
+            <a:endParaRPr/>
           </a:p>
         </p:txBody>
       </p:sp>
@@ -7729,6 +7759,7 @@
           <a:lstStyle/>
           <a:p>
             <a:pPr algn="ctr"/>
+            <a:endParaRPr/>
           </a:p>
         </p:txBody>
       </p:sp>
@@ -7874,19 +7905,20 @@
           <a:lstStyle/>
           <a:p>
             <a:pPr algn="ctr"/>
-          </a:p>
-        </p:txBody>
-      </p:sp>
-      <p:sp>
-        <p:nvSpPr>
-          <p:cNvPr id="41" name="TextBox 40"/>
-          <p:cNvSpPr txBox="1"/>
-          <p:nvPr/>
-        </p:nvSpPr>
-        <p:spPr>
-          <a:xfrm>
-            <a:off x="640080" y="4315968"/>
-            <a:ext cx="2743200" cy="274320"/>
+            <a:endParaRPr/>
+          </a:p>
+        </p:txBody>
+      </p:sp>
+      <p:sp>
+        <p:nvSpPr>
+          <p:cNvPr id="42" name="TextBox 41"/>
+          <p:cNvSpPr txBox="1"/>
+          <p:nvPr/>
+        </p:nvSpPr>
+        <p:spPr>
+          <a:xfrm>
+            <a:off x="566928" y="4448556"/>
+            <a:ext cx="10972800" cy="261610"/>
           </a:xfrm>
           <a:prstGeom prst="rect">
             <a:avLst/>
@@ -7901,47 +7933,42 @@
           <a:p>
             <a:pPr algn="l"/>
             <a:r>
-              <a:rPr sz="1200" b="1">
-                <a:solidFill>
-                  <a:srgbClr val="A6E3A1"/>
-                </a:solidFill>
-              </a:rPr>
-              <a:t>권장 탐색 순서</a:t>
-            </a:r>
-          </a:p>
-        </p:txBody>
-      </p:sp>
-      <p:sp>
-        <p:nvSpPr>
-          <p:cNvPr id="42" name="TextBox 41"/>
-          <p:cNvSpPr txBox="1"/>
-          <p:nvPr/>
-        </p:nvSpPr>
-        <p:spPr>
-          <a:xfrm>
-            <a:off x="640080" y="4617720"/>
-            <a:ext cx="10972800" cy="320040"/>
-          </a:xfrm>
-          <a:prstGeom prst="rect">
-            <a:avLst/>
-          </a:prstGeom>
-          <a:noFill/>
-        </p:spPr>
-        <p:txBody>
-          <a:bodyPr wrap="square">
-            <a:spAutoFit/>
-          </a:bodyPr>
-          <a:lstStyle/>
-          <a:p>
-            <a:pPr algn="l"/>
-            <a:r>
-              <a:rPr sz="1100" b="0">
+              <a:rPr lang="ko-KR" altLang="en-US" sz="1100" dirty="0">
                 <a:solidFill>
                   <a:srgbClr val="CDD6F4"/>
                 </a:solidFill>
               </a:rPr>
-              <a:t>① grid_model_arch  →  backbone 결정   ②  optuna_lr_focused  →  lr 최적화   ③  (선택) optuna_full  →  종합 확인</a:t>
-            </a:r>
+              <a:t>여기서 제공중인 탐색 공간 파일은 예시 파일입니다</a:t>
+            </a:r>
+            <a:r>
+              <a:rPr lang="en-US" altLang="ko-KR" sz="1100" dirty="0">
+                <a:solidFill>
+                  <a:srgbClr val="CDD6F4"/>
+                </a:solidFill>
+              </a:rPr>
+              <a:t>! scripts/README.md </a:t>
+            </a:r>
+            <a:r>
+              <a:rPr lang="ko-KR" altLang="en-US" sz="1100" dirty="0">
+                <a:solidFill>
+                  <a:srgbClr val="CDD6F4"/>
+                </a:solidFill>
+              </a:rPr>
+              <a:t>파일을 확인하시면 더 다양한 옵션을 확인할 수 있습니다</a:t>
+            </a:r>
+            <a:r>
+              <a:rPr lang="en-US" altLang="ko-KR" sz="1100" dirty="0">
+                <a:solidFill>
+                  <a:srgbClr val="CDD6F4"/>
+                </a:solidFill>
+              </a:rPr>
+              <a:t>.</a:t>
+            </a:r>
+            <a:endParaRPr sz="1100" b="0" dirty="0">
+              <a:solidFill>
+                <a:srgbClr val="CDD6F4"/>
+              </a:solidFill>
+            </a:endParaRPr>
           </a:p>
         </p:txBody>
       </p:sp>
@@ -7954,7 +7981,7 @@
 </file>
 
 <file path=ppt/slides/slide5.xml><?xml version="1.0" encoding="utf-8"?>
-<p:sld xmlns:a="http://schemas.openxmlformats.org/drawingml/2006/main" xmlns:p="http://schemas.openxmlformats.org/presentationml/2006/main" xmlns:r="http://schemas.openxmlformats.org/officeDocument/2006/relationships">
+<p:sld xmlns:a="http://schemas.openxmlformats.org/drawingml/2006/main" xmlns:r="http://schemas.openxmlformats.org/officeDocument/2006/relationships" xmlns:p="http://schemas.openxmlformats.org/presentationml/2006/main">
   <p:cSld>
     <p:bg>
       <p:bgPr>
@@ -7970,7 +7997,14 @@
         <p:cNvGrpSpPr/>
         <p:nvPr/>
       </p:nvGrpSpPr>
-      <p:grpSpPr/>
+      <p:grpSpPr>
+        <a:xfrm>
+          <a:off x="0" y="0"/>
+          <a:ext cx="0" cy="0"/>
+          <a:chOff x="0" y="0"/>
+          <a:chExt cx="0" cy="0"/>
+        </a:xfrm>
+      </p:grpSpPr>
       <p:sp>
         <p:nvSpPr>
           <p:cNvPr id="2" name="Rectangle 1"/>
@@ -8011,6 +8045,7 @@
           <a:lstStyle/>
           <a:p>
             <a:pPr algn="ctr"/>
+            <a:endParaRPr/>
           </a:p>
         </p:txBody>
       </p:sp>
@@ -8023,7 +8058,7 @@
         <p:spPr>
           <a:xfrm>
             <a:off x="502920" y="292608"/>
-            <a:ext cx="1554480" cy="237744"/>
+            <a:ext cx="1554480" cy="246221"/>
           </a:xfrm>
           <a:prstGeom prst="rect">
             <a:avLst/>
@@ -8038,11 +8073,7 @@
           <a:p>
             <a:pPr algn="ctr"/>
             <a:r>
-              <a:rPr sz="1000" b="1">
-                <a:solidFill>
-                  <a:srgbClr val="FFFFFF"/>
-                </a:solidFill>
-              </a:rPr>
+              <a:rPr sz="1000" b="1" dirty="0"/>
               <a:t>YAML FORMAT</a:t>
             </a:r>
           </a:p>
@@ -8122,6 +8153,7 @@
           <a:lstStyle/>
           <a:p>
             <a:pPr algn="ctr"/>
+            <a:endParaRPr/>
           </a:p>
         </p:txBody>
       </p:sp>
@@ -8233,6 +8265,7 @@
           <a:lstStyle/>
           <a:p>
             <a:pPr algn="ctr"/>
+            <a:endParaRPr/>
           </a:p>
         </p:txBody>
       </p:sp>
@@ -8302,6 +8335,14 @@
             </a:r>
           </a:p>
           <a:p>
+            <a:endParaRPr sz="1100">
+              <a:solidFill>
+                <a:srgbClr val="A6E3A1"/>
+              </a:solidFill>
+              <a:latin typeface="Consolas"/>
+            </a:endParaRPr>
+          </a:p>
+          <a:p>
             <a:r>
               <a:rPr sz="1100">
                 <a:solidFill>
@@ -8309,7 +8350,7 @@
                 </a:solidFill>
                 <a:latin typeface="Consolas"/>
               </a:rPr>
-              <a:t/>
+              <a:t>train:</a:t>
             </a:r>
           </a:p>
           <a:p>
@@ -8320,7 +8361,7 @@
                 </a:solidFill>
                 <a:latin typeface="Consolas"/>
               </a:rPr>
-              <a:t>train:</a:t>
+              <a:t>  lr0:</a:t>
             </a:r>
           </a:p>
           <a:p>
@@ -8331,7 +8372,7 @@
                 </a:solidFill>
                 <a:latin typeface="Consolas"/>
               </a:rPr>
-              <a:t>  lr0:</a:t>
+              <a:t>    - 0.00003</a:t>
             </a:r>
           </a:p>
           <a:p>
@@ -8342,7 +8383,7 @@
                 </a:solidFill>
                 <a:latin typeface="Consolas"/>
               </a:rPr>
-              <a:t>    - 0.00003</a:t>
+              <a:t>    - 0.0001</a:t>
             </a:r>
           </a:p>
           <a:p>
@@ -8353,7 +8394,7 @@
                 </a:solidFill>
                 <a:latin typeface="Consolas"/>
               </a:rPr>
-              <a:t>    - 0.0001</a:t>
+              <a:t>    - 0.0003</a:t>
             </a:r>
           </a:p>
           <a:p>
@@ -8364,7 +8405,7 @@
                 </a:solidFill>
                 <a:latin typeface="Consolas"/>
               </a:rPr>
-              <a:t>    - 0.0003</a:t>
+              <a:t>  weight_decay:</a:t>
             </a:r>
           </a:p>
           <a:p>
@@ -8375,7 +8416,7 @@
                 </a:solidFill>
                 <a:latin typeface="Consolas"/>
               </a:rPr>
-              <a:t>  weight_decay:</a:t>
+              <a:t>    - 0.001</a:t>
             </a:r>
           </a:p>
           <a:p>
@@ -8386,7 +8427,7 @@
                 </a:solidFill>
                 <a:latin typeface="Consolas"/>
               </a:rPr>
-              <a:t>    - 0.001</a:t>
+              <a:t>    - 0.01</a:t>
             </a:r>
           </a:p>
           <a:p>
@@ -8397,7 +8438,7 @@
                 </a:solidFill>
                 <a:latin typeface="Consolas"/>
               </a:rPr>
-              <a:t>    - 0.01</a:t>
+              <a:t>  label_smoothing:</a:t>
             </a:r>
           </a:p>
           <a:p>
@@ -8408,7 +8449,7 @@
                 </a:solidFill>
                 <a:latin typeface="Consolas"/>
               </a:rPr>
-              <a:t>  label_smoothing:</a:t>
+              <a:t>    - 0.0</a:t>
             </a:r>
           </a:p>
           <a:p>
@@ -8419,30 +8460,16 @@
                 </a:solidFill>
                 <a:latin typeface="Consolas"/>
               </a:rPr>
-              <a:t>    - 0.0</a:t>
-            </a:r>
-          </a:p>
-          <a:p>
-            <a:r>
-              <a:rPr sz="1100">
-                <a:solidFill>
-                  <a:srgbClr val="A6E3A1"/>
-                </a:solidFill>
-                <a:latin typeface="Consolas"/>
-              </a:rPr>
               <a:t>    - 0.05</a:t>
             </a:r>
           </a:p>
           <a:p>
-            <a:r>
-              <a:rPr sz="1100">
-                <a:solidFill>
-                  <a:srgbClr val="A6E3A1"/>
-                </a:solidFill>
-                <a:latin typeface="Consolas"/>
-              </a:rPr>
-              <a:t/>
-            </a:r>
+            <a:endParaRPr sz="1100">
+              <a:solidFill>
+                <a:srgbClr val="A6E3A1"/>
+              </a:solidFill>
+              <a:latin typeface="Consolas"/>
+            </a:endParaRPr>
           </a:p>
           <a:p>
             <a:r>
@@ -8565,6 +8592,7 @@
           <a:lstStyle/>
           <a:p>
             <a:pPr algn="ctr"/>
+            <a:endParaRPr/>
           </a:p>
         </p:txBody>
       </p:sp>
@@ -8577,21 +8605,21 @@
         <p:spPr>
           <a:xfrm>
             <a:off x="6446520" y="1874519"/>
-            <a:ext cx="5212080" cy="3291839"/>
-          </a:xfrm>
-          <a:prstGeom prst="rect">
-            <a:avLst/>
-          </a:prstGeom>
-          <a:noFill/>
-        </p:spPr>
-        <p:txBody>
-          <a:bodyPr wrap="square">
-            <a:spAutoFit/>
-          </a:bodyPr>
-          <a:lstStyle/>
-          <a:p>
-            <a:r>
-              <a:rPr sz="1100">
+            <a:ext cx="5212080" cy="3277820"/>
+          </a:xfrm>
+          <a:prstGeom prst="rect">
+            <a:avLst/>
+          </a:prstGeom>
+          <a:noFill/>
+        </p:spPr>
+        <p:txBody>
+          <a:bodyPr wrap="square">
+            <a:spAutoFit/>
+          </a:bodyPr>
+          <a:lstStyle/>
+          <a:p>
+            <a:r>
+              <a:rPr sz="900" dirty="0">
                 <a:solidFill>
                   <a:srgbClr val="A6E3A1"/>
                 </a:solidFill>
@@ -8602,7 +8630,7 @@
           </a:p>
           <a:p>
             <a:r>
-              <a:rPr sz="1100">
+              <a:rPr sz="900" dirty="0">
                 <a:solidFill>
                   <a:srgbClr val="A6E3A1"/>
                 </a:solidFill>
@@ -8613,7 +8641,7 @@
           </a:p>
           <a:p>
             <a:r>
-              <a:rPr sz="1100">
+              <a:rPr sz="900" dirty="0">
                 <a:solidFill>
                   <a:srgbClr val="A6E3A1"/>
                 </a:solidFill>
@@ -8624,7 +8652,7 @@
           </a:p>
           <a:p>
             <a:r>
-              <a:rPr sz="1100">
+              <a:rPr sz="900" dirty="0">
                 <a:solidFill>
                   <a:srgbClr val="A6E3A1"/>
                 </a:solidFill>
@@ -8634,206 +8662,230 @@
             </a:r>
           </a:p>
           <a:p>
-            <a:r>
-              <a:rPr sz="1100">
+            <a:endParaRPr sz="900" dirty="0">
+              <a:solidFill>
+                <a:srgbClr val="A6E3A1"/>
+              </a:solidFill>
+              <a:latin typeface="Consolas"/>
+            </a:endParaRPr>
+          </a:p>
+          <a:p>
+            <a:r>
+              <a:rPr sz="900" dirty="0">
                 <a:solidFill>
                   <a:srgbClr val="A6E3A1"/>
                 </a:solidFill>
                 <a:latin typeface="Consolas"/>
               </a:rPr>
-              <a:t/>
-            </a:r>
-          </a:p>
-          <a:p>
-            <a:r>
-              <a:rPr sz="1100">
+              <a:t>train:</a:t>
+            </a:r>
+          </a:p>
+          <a:p>
+            <a:r>
+              <a:rPr sz="900" dirty="0">
                 <a:solidFill>
                   <a:srgbClr val="A6E3A1"/>
                 </a:solidFill>
                 <a:latin typeface="Consolas"/>
               </a:rPr>
-              <a:t>train:</a:t>
-            </a:r>
-          </a:p>
-          <a:p>
-            <a:r>
-              <a:rPr sz="1100">
+              <a:t>  lr0:</a:t>
+            </a:r>
+          </a:p>
+          <a:p>
+            <a:r>
+              <a:rPr sz="900" dirty="0">
                 <a:solidFill>
                   <a:srgbClr val="A6E3A1"/>
                 </a:solidFill>
                 <a:latin typeface="Consolas"/>
               </a:rPr>
-              <a:t>  lr0:</a:t>
-            </a:r>
-          </a:p>
-          <a:p>
-            <a:r>
-              <a:rPr sz="1100">
+              <a:t>    type: float</a:t>
+            </a:r>
+          </a:p>
+          <a:p>
+            <a:r>
+              <a:rPr sz="900" dirty="0">
                 <a:solidFill>
                   <a:srgbClr val="A6E3A1"/>
                 </a:solidFill>
                 <a:latin typeface="Consolas"/>
               </a:rPr>
+              <a:t>    low: 0.000005</a:t>
+            </a:r>
+          </a:p>
+          <a:p>
+            <a:r>
+              <a:rPr sz="900" dirty="0">
+                <a:solidFill>
+                  <a:srgbClr val="A6E3A1"/>
+                </a:solidFill>
+                <a:latin typeface="Consolas"/>
+              </a:rPr>
+              <a:t>    high: 0.001</a:t>
+            </a:r>
+          </a:p>
+          <a:p>
+            <a:r>
+              <a:rPr sz="900" dirty="0">
+                <a:solidFill>
+                  <a:srgbClr val="A6E3A1"/>
+                </a:solidFill>
+                <a:latin typeface="Consolas"/>
+              </a:rPr>
+              <a:t>    log: true       # log scale </a:t>
+            </a:r>
+            <a:r>
+              <a:rPr sz="900" dirty="0" err="1">
+                <a:solidFill>
+                  <a:srgbClr val="A6E3A1"/>
+                </a:solidFill>
+                <a:latin typeface="Consolas"/>
+              </a:rPr>
+              <a:t>탐색</a:t>
+            </a:r>
+            <a:endParaRPr sz="900" dirty="0">
+              <a:solidFill>
+                <a:srgbClr val="A6E3A1"/>
+              </a:solidFill>
+              <a:latin typeface="Consolas"/>
+            </a:endParaRPr>
+          </a:p>
+          <a:p>
+            <a:endParaRPr sz="900" dirty="0">
+              <a:solidFill>
+                <a:srgbClr val="A6E3A1"/>
+              </a:solidFill>
+              <a:latin typeface="Consolas"/>
+            </a:endParaRPr>
+          </a:p>
+          <a:p>
+            <a:r>
+              <a:rPr sz="900" dirty="0">
+                <a:solidFill>
+                  <a:srgbClr val="A6E3A1"/>
+                </a:solidFill>
+                <a:latin typeface="Consolas"/>
+              </a:rPr>
+              <a:t>  </a:t>
+            </a:r>
+            <a:r>
+              <a:rPr sz="900" dirty="0" err="1">
+                <a:solidFill>
+                  <a:srgbClr val="A6E3A1"/>
+                </a:solidFill>
+                <a:latin typeface="Consolas"/>
+              </a:rPr>
+              <a:t>weight_decay</a:t>
+            </a:r>
+            <a:r>
+              <a:rPr sz="900" dirty="0">
+                <a:solidFill>
+                  <a:srgbClr val="A6E3A1"/>
+                </a:solidFill>
+                <a:latin typeface="Consolas"/>
+              </a:rPr>
+              <a:t>:</a:t>
+            </a:r>
+          </a:p>
+          <a:p>
+            <a:r>
+              <a:rPr sz="900" dirty="0">
+                <a:solidFill>
+                  <a:srgbClr val="A6E3A1"/>
+                </a:solidFill>
+                <a:latin typeface="Consolas"/>
+              </a:rPr>
               <a:t>    type: float</a:t>
             </a:r>
           </a:p>
           <a:p>
             <a:r>
-              <a:rPr sz="1100">
+              <a:rPr sz="900" dirty="0">
                 <a:solidFill>
                   <a:srgbClr val="A6E3A1"/>
                 </a:solidFill>
                 <a:latin typeface="Consolas"/>
               </a:rPr>
-              <a:t>    low: 0.000005</a:t>
-            </a:r>
-          </a:p>
-          <a:p>
-            <a:r>
-              <a:rPr sz="1100">
+              <a:t>    low: 0.00005</a:t>
+            </a:r>
+          </a:p>
+          <a:p>
+            <a:r>
+              <a:rPr sz="900" dirty="0">
                 <a:solidFill>
                   <a:srgbClr val="A6E3A1"/>
                 </a:solidFill>
                 <a:latin typeface="Consolas"/>
               </a:rPr>
-              <a:t>    high: 0.001</a:t>
-            </a:r>
-          </a:p>
-          <a:p>
-            <a:r>
-              <a:rPr sz="1100">
+              <a:t>    high: 0.05</a:t>
+            </a:r>
+          </a:p>
+          <a:p>
+            <a:r>
+              <a:rPr sz="900" dirty="0">
                 <a:solidFill>
                   <a:srgbClr val="A6E3A1"/>
                 </a:solidFill>
                 <a:latin typeface="Consolas"/>
               </a:rPr>
-              <a:t>    log: true       # log scale 탐색</a:t>
-            </a:r>
-          </a:p>
-          <a:p>
-            <a:r>
-              <a:rPr sz="1100">
+              <a:t>    log: true</a:t>
+            </a:r>
+          </a:p>
+          <a:p>
+            <a:endParaRPr sz="900" dirty="0">
+              <a:solidFill>
+                <a:srgbClr val="A6E3A1"/>
+              </a:solidFill>
+              <a:latin typeface="Consolas"/>
+            </a:endParaRPr>
+          </a:p>
+          <a:p>
+            <a:r>
+              <a:rPr sz="900" dirty="0">
                 <a:solidFill>
                   <a:srgbClr val="A6E3A1"/>
                 </a:solidFill>
                 <a:latin typeface="Consolas"/>
               </a:rPr>
-              <a:t/>
-            </a:r>
-          </a:p>
-          <a:p>
-            <a:r>
-              <a:rPr sz="1100">
+              <a:t>  batch:</a:t>
+            </a:r>
+          </a:p>
+          <a:p>
+            <a:r>
+              <a:rPr sz="900" dirty="0">
                 <a:solidFill>
                   <a:srgbClr val="A6E3A1"/>
                 </a:solidFill>
                 <a:latin typeface="Consolas"/>
               </a:rPr>
-              <a:t>  weight_decay:</a:t>
-            </a:r>
-          </a:p>
-          <a:p>
-            <a:r>
-              <a:rPr sz="1100">
+              <a:t>    type: int</a:t>
+            </a:r>
+          </a:p>
+          <a:p>
+            <a:r>
+              <a:rPr sz="900" dirty="0">
                 <a:solidFill>
                   <a:srgbClr val="A6E3A1"/>
                 </a:solidFill>
                 <a:latin typeface="Consolas"/>
               </a:rPr>
-              <a:t>    type: float</a:t>
-            </a:r>
-          </a:p>
-          <a:p>
-            <a:r>
-              <a:rPr sz="1100">
+              <a:t>    low: 16</a:t>
+            </a:r>
+          </a:p>
+          <a:p>
+            <a:r>
+              <a:rPr sz="900" dirty="0">
                 <a:solidFill>
                   <a:srgbClr val="A6E3A1"/>
                 </a:solidFill>
                 <a:latin typeface="Consolas"/>
               </a:rPr>
-              <a:t>    low: 0.00005</a:t>
-            </a:r>
-          </a:p>
-          <a:p>
-            <a:r>
-              <a:rPr sz="1100">
-                <a:solidFill>
-                  <a:srgbClr val="A6E3A1"/>
-                </a:solidFill>
-                <a:latin typeface="Consolas"/>
-              </a:rPr>
-              <a:t>    high: 0.05</a:t>
-            </a:r>
-          </a:p>
-          <a:p>
-            <a:r>
-              <a:rPr sz="1100">
-                <a:solidFill>
-                  <a:srgbClr val="A6E3A1"/>
-                </a:solidFill>
-                <a:latin typeface="Consolas"/>
-              </a:rPr>
-              <a:t>    log: true</a:t>
-            </a:r>
-          </a:p>
-          <a:p>
-            <a:r>
-              <a:rPr sz="1100">
-                <a:solidFill>
-                  <a:srgbClr val="A6E3A1"/>
-                </a:solidFill>
-                <a:latin typeface="Consolas"/>
-              </a:rPr>
-              <a:t/>
-            </a:r>
-          </a:p>
-          <a:p>
-            <a:r>
-              <a:rPr sz="1100">
-                <a:solidFill>
-                  <a:srgbClr val="A6E3A1"/>
-                </a:solidFill>
-                <a:latin typeface="Consolas"/>
-              </a:rPr>
-              <a:t>  batch:</a:t>
-            </a:r>
-          </a:p>
-          <a:p>
-            <a:r>
-              <a:rPr sz="1100">
-                <a:solidFill>
-                  <a:srgbClr val="A6E3A1"/>
-                </a:solidFill>
-                <a:latin typeface="Consolas"/>
-              </a:rPr>
-              <a:t>    type: int</a:t>
-            </a:r>
-          </a:p>
-          <a:p>
-            <a:r>
-              <a:rPr sz="1100">
-                <a:solidFill>
-                  <a:srgbClr val="A6E3A1"/>
-                </a:solidFill>
-                <a:latin typeface="Consolas"/>
-              </a:rPr>
-              <a:t>    low: 16</a:t>
-            </a:r>
-          </a:p>
-          <a:p>
-            <a:r>
-              <a:rPr sz="1100">
-                <a:solidFill>
-                  <a:srgbClr val="A6E3A1"/>
-                </a:solidFill>
-                <a:latin typeface="Consolas"/>
-              </a:rPr>
               <a:t>    high: 64</a:t>
             </a:r>
           </a:p>
           <a:p>
             <a:r>
-              <a:rPr sz="1100">
+              <a:rPr sz="900" dirty="0">
                 <a:solidFill>
                   <a:srgbClr val="A6E3A1"/>
                 </a:solidFill>
@@ -8884,6 +8936,7 @@
           <a:lstStyle/>
           <a:p>
             <a:pPr algn="ctr"/>
+            <a:endParaRPr/>
           </a:p>
         </p:txBody>
       </p:sp>
@@ -8945,12 +8998,124 @@
           <a:p>
             <a:pPr algn="l"/>
             <a:r>
-              <a:rPr sz="1000" b="0">
+              <a:rPr sz="1000" b="0" dirty="0">
                 <a:solidFill>
                   <a:srgbClr val="CDD6F4"/>
                 </a:solidFill>
               </a:rPr>
-              <a:t>dotted key(train.lr0)와 nested YAML(train: lr0: ...) 모두 지원  |  최상위 key는 config 섹션명과 일치해야 함 (model, train, data, val ...)</a:t>
+              <a:t>dotted key(train.lr0)와 nested YAML(train: lr0: ...) </a:t>
+            </a:r>
+            <a:r>
+              <a:rPr sz="1000" b="0" dirty="0" err="1">
+                <a:solidFill>
+                  <a:srgbClr val="CDD6F4"/>
+                </a:solidFill>
+              </a:rPr>
+              <a:t>모두</a:t>
+            </a:r>
+            <a:r>
+              <a:rPr sz="1000" b="0" dirty="0">
+                <a:solidFill>
+                  <a:srgbClr val="CDD6F4"/>
+                </a:solidFill>
+              </a:rPr>
+              <a:t> </a:t>
+            </a:r>
+            <a:r>
+              <a:rPr sz="1000" b="0" dirty="0" err="1">
+                <a:solidFill>
+                  <a:srgbClr val="CDD6F4"/>
+                </a:solidFill>
+              </a:rPr>
+              <a:t>지원</a:t>
+            </a:r>
+            <a:r>
+              <a:rPr sz="1000" b="0" dirty="0">
+                <a:solidFill>
+                  <a:srgbClr val="CDD6F4"/>
+                </a:solidFill>
+              </a:rPr>
+              <a:t>  |  </a:t>
+            </a:r>
+            <a:r>
+              <a:rPr sz="1000" b="0" dirty="0" err="1">
+                <a:solidFill>
+                  <a:srgbClr val="CDD6F4"/>
+                </a:solidFill>
+              </a:rPr>
+              <a:t>최상위</a:t>
+            </a:r>
+            <a:r>
+              <a:rPr sz="1000" b="0" dirty="0">
+                <a:solidFill>
+                  <a:srgbClr val="CDD6F4"/>
+                </a:solidFill>
+              </a:rPr>
+              <a:t> </a:t>
+            </a:r>
+            <a:r>
+              <a:rPr sz="1000" b="0" dirty="0" err="1">
+                <a:solidFill>
+                  <a:srgbClr val="CDD6F4"/>
+                </a:solidFill>
+              </a:rPr>
+              <a:t>key는</a:t>
+            </a:r>
+            <a:r>
+              <a:rPr sz="1000" b="0" dirty="0">
+                <a:solidFill>
+                  <a:srgbClr val="CDD6F4"/>
+                </a:solidFill>
+              </a:rPr>
+              <a:t> config </a:t>
+            </a:r>
+            <a:r>
+              <a:rPr sz="1000" b="0" dirty="0" err="1">
+                <a:solidFill>
+                  <a:srgbClr val="CDD6F4"/>
+                </a:solidFill>
+              </a:rPr>
+              <a:t>섹션명과</a:t>
+            </a:r>
+            <a:r>
+              <a:rPr sz="1000" b="0" dirty="0">
+                <a:solidFill>
+                  <a:srgbClr val="CDD6F4"/>
+                </a:solidFill>
+              </a:rPr>
+              <a:t> </a:t>
+            </a:r>
+            <a:r>
+              <a:rPr sz="1000" b="0" dirty="0" err="1">
+                <a:solidFill>
+                  <a:srgbClr val="CDD6F4"/>
+                </a:solidFill>
+              </a:rPr>
+              <a:t>일치해야</a:t>
+            </a:r>
+            <a:r>
+              <a:rPr sz="1000" b="0" dirty="0">
+                <a:solidFill>
+                  <a:srgbClr val="CDD6F4"/>
+                </a:solidFill>
+              </a:rPr>
+              <a:t> 함 (model, train, data, </a:t>
+            </a:r>
+            <a:r>
+              <a:rPr sz="1000" b="0" dirty="0" err="1">
+                <a:solidFill>
+                  <a:srgbClr val="CDD6F4"/>
+                </a:solidFill>
+              </a:rPr>
+              <a:t>val</a:t>
+            </a:r>
+            <a:r>
+              <a:rPr sz="1000" b="0" dirty="0">
+                <a:solidFill>
+                  <a:srgbClr val="CDD6F4"/>
+                </a:solidFill>
+              </a:rPr>
+              <a:t> ...)</a:t>
             </a:r>
           </a:p>
         </p:txBody>
@@ -8964,7 +9129,7 @@
 </file>
 
 <file path=ppt/slides/slide6.xml><?xml version="1.0" encoding="utf-8"?>
-<p:sld xmlns:a="http://schemas.openxmlformats.org/drawingml/2006/main" xmlns:p="http://schemas.openxmlformats.org/presentationml/2006/main" xmlns:r="http://schemas.openxmlformats.org/officeDocument/2006/relationships">
+<p:sld xmlns:a="http://schemas.openxmlformats.org/drawingml/2006/main" xmlns:r="http://schemas.openxmlformats.org/officeDocument/2006/relationships" xmlns:p="http://schemas.openxmlformats.org/presentationml/2006/main">
   <p:cSld>
     <p:bg>
       <p:bgPr>
@@ -8980,7 +9145,14 @@
         <p:cNvGrpSpPr/>
         <p:nvPr/>
       </p:nvGrpSpPr>
-      <p:grpSpPr/>
+      <p:grpSpPr>
+        <a:xfrm>
+          <a:off x="0" y="0"/>
+          <a:ext cx="0" cy="0"/>
+          <a:chOff x="0" y="0"/>
+          <a:chExt cx="0" cy="0"/>
+        </a:xfrm>
+      </p:grpSpPr>
       <p:sp>
         <p:nvSpPr>
           <p:cNvPr id="2" name="Rectangle 1"/>
@@ -9021,6 +9193,7 @@
           <a:lstStyle/>
           <a:p>
             <a:pPr algn="ctr"/>
+            <a:endParaRPr/>
           </a:p>
         </p:txBody>
       </p:sp>
@@ -9033,7 +9206,7 @@
         <p:spPr>
           <a:xfrm>
             <a:off x="502920" y="292608"/>
-            <a:ext cx="1554480" cy="237744"/>
+            <a:ext cx="1554480" cy="246221"/>
           </a:xfrm>
           <a:prstGeom prst="rect">
             <a:avLst/>
@@ -9048,11 +9221,7 @@
           <a:p>
             <a:pPr algn="ctr"/>
             <a:r>
-              <a:rPr sz="1000" b="1">
-                <a:solidFill>
-                  <a:srgbClr val="FFFFFF"/>
-                </a:solidFill>
-              </a:rPr>
+              <a:rPr sz="1000" b="1" dirty="0"/>
               <a:t>WORKFLOW</a:t>
             </a:r>
           </a:p>
@@ -9132,6 +9301,7 @@
           <a:lstStyle/>
           <a:p>
             <a:pPr algn="ctr"/>
+            <a:endParaRPr/>
           </a:p>
         </p:txBody>
       </p:sp>
@@ -9175,6 +9345,7 @@
           <a:lstStyle/>
           <a:p>
             <a:pPr algn="ctr"/>
+            <a:endParaRPr/>
           </a:p>
         </p:txBody>
       </p:sp>
@@ -9218,6 +9389,7 @@
           <a:lstStyle/>
           <a:p>
             <a:pPr algn="ctr"/>
+            <a:endParaRPr/>
           </a:p>
         </p:txBody>
       </p:sp>
@@ -9230,7 +9402,7 @@
         <p:spPr>
           <a:xfrm>
             <a:off x="457200" y="1188720"/>
-            <a:ext cx="2468880" cy="256032"/>
+            <a:ext cx="2468880" cy="276999"/>
           </a:xfrm>
           <a:prstGeom prst="rect">
             <a:avLst/>
@@ -9245,11 +9417,7 @@
           <a:p>
             <a:pPr algn="l"/>
             <a:r>
-              <a:rPr sz="1200" b="1">
-                <a:solidFill>
-                  <a:srgbClr val="FFFFFF"/>
-                </a:solidFill>
-              </a:rPr>
+              <a:rPr sz="1200" b="1"/>
               <a:t>§1</a:t>
             </a:r>
           </a:p>
@@ -9364,6 +9532,7 @@
           <a:lstStyle/>
           <a:p>
             <a:pPr algn="ctr"/>
+            <a:endParaRPr/>
           </a:p>
         </p:txBody>
       </p:sp>
@@ -9407,6 +9576,7 @@
           <a:lstStyle/>
           <a:p>
             <a:pPr algn="ctr"/>
+            <a:endParaRPr/>
           </a:p>
         </p:txBody>
       </p:sp>
@@ -9419,7 +9589,7 @@
         <p:spPr>
           <a:xfrm>
             <a:off x="3337560" y="1188720"/>
-            <a:ext cx="2468880" cy="256032"/>
+            <a:ext cx="2468880" cy="276999"/>
           </a:xfrm>
           <a:prstGeom prst="rect">
             <a:avLst/>
@@ -9434,11 +9604,7 @@
           <a:p>
             <a:pPr algn="l"/>
             <a:r>
-              <a:rPr sz="1200" b="1">
-                <a:solidFill>
-                  <a:srgbClr val="FFFFFF"/>
-                </a:solidFill>
-              </a:rPr>
+              <a:rPr sz="1200" b="1"/>
               <a:t>§2</a:t>
             </a:r>
           </a:p>
@@ -9553,6 +9719,7 @@
           <a:lstStyle/>
           <a:p>
             <a:pPr algn="ctr"/>
+            <a:endParaRPr/>
           </a:p>
         </p:txBody>
       </p:sp>
@@ -9596,6 +9763,7 @@
           <a:lstStyle/>
           <a:p>
             <a:pPr algn="ctr"/>
+            <a:endParaRPr/>
           </a:p>
         </p:txBody>
       </p:sp>
@@ -9608,7 +9776,7 @@
         <p:spPr>
           <a:xfrm>
             <a:off x="6217920" y="1188720"/>
-            <a:ext cx="2468880" cy="256032"/>
+            <a:ext cx="2468880" cy="276999"/>
           </a:xfrm>
           <a:prstGeom prst="rect">
             <a:avLst/>
@@ -9623,11 +9791,7 @@
           <a:p>
             <a:pPr algn="l"/>
             <a:r>
-              <a:rPr sz="1200" b="1">
-                <a:solidFill>
-                  <a:srgbClr val="FFFFFF"/>
-                </a:solidFill>
-              </a:rPr>
+              <a:rPr sz="1200" b="1"/>
               <a:t>§2-1</a:t>
             </a:r>
           </a:p>
@@ -9742,6 +9906,7 @@
           <a:lstStyle/>
           <a:p>
             <a:pPr algn="ctr"/>
+            <a:endParaRPr/>
           </a:p>
         </p:txBody>
       </p:sp>
@@ -9785,6 +9950,7 @@
           <a:lstStyle/>
           <a:p>
             <a:pPr algn="ctr"/>
+            <a:endParaRPr/>
           </a:p>
         </p:txBody>
       </p:sp>
@@ -9797,7 +9963,7 @@
         <p:spPr>
           <a:xfrm>
             <a:off x="9098280" y="1188720"/>
-            <a:ext cx="2468880" cy="256032"/>
+            <a:ext cx="2468880" cy="276999"/>
           </a:xfrm>
           <a:prstGeom prst="rect">
             <a:avLst/>
@@ -9812,11 +9978,7 @@
           <a:p>
             <a:pPr algn="l"/>
             <a:r>
-              <a:rPr sz="1200" b="1">
-                <a:solidFill>
-                  <a:srgbClr val="FFFFFF"/>
-                </a:solidFill>
-              </a:rPr>
+              <a:rPr sz="1200" b="1"/>
               <a:t>§3</a:t>
             </a:r>
           </a:p>
@@ -9931,6 +10093,7 @@
           <a:lstStyle/>
           <a:p>
             <a:pPr algn="ctr"/>
+            <a:endParaRPr/>
           </a:p>
         </p:txBody>
       </p:sp>
@@ -9974,6 +10137,7 @@
           <a:lstStyle/>
           <a:p>
             <a:pPr algn="ctr"/>
+            <a:endParaRPr/>
           </a:p>
         </p:txBody>
       </p:sp>
@@ -9986,7 +10150,7 @@
         <p:spPr>
           <a:xfrm>
             <a:off x="457200" y="3794759"/>
-            <a:ext cx="2468880" cy="256032"/>
+            <a:ext cx="2468880" cy="276999"/>
           </a:xfrm>
           <a:prstGeom prst="rect">
             <a:avLst/>
@@ -10001,11 +10165,7 @@
           <a:p>
             <a:pPr algn="l"/>
             <a:r>
-              <a:rPr sz="1200" b="1">
-                <a:solidFill>
-                  <a:srgbClr val="FFFFFF"/>
-                </a:solidFill>
-              </a:rPr>
+              <a:rPr sz="1200" b="1"/>
               <a:t>§4</a:t>
             </a:r>
           </a:p>
@@ -10120,6 +10280,7 @@
           <a:lstStyle/>
           <a:p>
             <a:pPr algn="ctr"/>
+            <a:endParaRPr/>
           </a:p>
         </p:txBody>
       </p:sp>
@@ -10163,6 +10324,7 @@
           <a:lstStyle/>
           <a:p>
             <a:pPr algn="ctr"/>
+            <a:endParaRPr/>
           </a:p>
         </p:txBody>
       </p:sp>
@@ -10175,7 +10337,7 @@
         <p:spPr>
           <a:xfrm>
             <a:off x="3337560" y="3794759"/>
-            <a:ext cx="2468880" cy="256032"/>
+            <a:ext cx="2468880" cy="276999"/>
           </a:xfrm>
           <a:prstGeom prst="rect">
             <a:avLst/>
@@ -10190,11 +10352,7 @@
           <a:p>
             <a:pPr algn="l"/>
             <a:r>
-              <a:rPr sz="1200" b="1">
-                <a:solidFill>
-                  <a:srgbClr val="FFFFFF"/>
-                </a:solidFill>
-              </a:rPr>
+              <a:rPr sz="1200" b="1"/>
               <a:t>§5</a:t>
             </a:r>
           </a:p>
@@ -10309,6 +10467,7 @@
           <a:lstStyle/>
           <a:p>
             <a:pPr algn="ctr"/>
+            <a:endParaRPr/>
           </a:p>
         </p:txBody>
       </p:sp>
@@ -10352,6 +10511,7 @@
           <a:lstStyle/>
           <a:p>
             <a:pPr algn="ctr"/>
+            <a:endParaRPr/>
           </a:p>
         </p:txBody>
       </p:sp>
@@ -10364,7 +10524,7 @@
         <p:spPr>
           <a:xfrm>
             <a:off x="6217920" y="3794759"/>
-            <a:ext cx="2468880" cy="256032"/>
+            <a:ext cx="2468880" cy="276999"/>
           </a:xfrm>
           <a:prstGeom prst="rect">
             <a:avLst/>
@@ -10379,11 +10539,7 @@
           <a:p>
             <a:pPr algn="l"/>
             <a:r>
-              <a:rPr sz="1200" b="1">
-                <a:solidFill>
-                  <a:srgbClr val="FFFFFF"/>
-                </a:solidFill>
-              </a:rPr>
+              <a:rPr sz="1200" b="1"/>
               <a:t>§6</a:t>
             </a:r>
           </a:p>
@@ -10447,14 +10603,83 @@
           <a:p>
             <a:pPr algn="l"/>
             <a:r>
-              <a:rPr sz="900" b="0">
+              <a:rPr sz="900" b="0" dirty="0" err="1">
                 <a:solidFill>
                   <a:srgbClr val="CDD6F4"/>
                 </a:solidFill>
               </a:rPr>
-              <a:t>best_trial.json → s2_best_config.yaml 저장
-이후 stage2_train --config 에 이 파일 지정</a:t>
-            </a:r>
+              <a:t>best_trial.json</a:t>
+            </a:r>
+            <a:r>
+              <a:rPr sz="900" b="0" dirty="0">
+                <a:solidFill>
+                  <a:srgbClr val="CDD6F4"/>
+                </a:solidFill>
+              </a:rPr>
+              <a:t> → s2_best_config.yaml </a:t>
+            </a:r>
+            <a:r>
+              <a:rPr sz="900" b="0" dirty="0" err="1">
+                <a:solidFill>
+                  <a:srgbClr val="CDD6F4"/>
+                </a:solidFill>
+              </a:rPr>
+              <a:t>저장</a:t>
+            </a:r>
+            <a:r>
+              <a:rPr sz="900" b="0" dirty="0">
+                <a:solidFill>
+                  <a:srgbClr val="CDD6F4"/>
+                </a:solidFill>
+              </a:rPr>
+              <a:t>
+</a:t>
+            </a:r>
+            <a:r>
+              <a:rPr sz="900" b="0" dirty="0" err="1">
+                <a:solidFill>
+                  <a:srgbClr val="CDD6F4"/>
+                </a:solidFill>
+              </a:rPr>
+              <a:t>이후</a:t>
+            </a:r>
+            <a:r>
+              <a:rPr sz="900" b="0" dirty="0">
+                <a:solidFill>
+                  <a:srgbClr val="CDD6F4"/>
+                </a:solidFill>
+              </a:rPr>
+              <a:t> stage2_train --config 에 이 </a:t>
+            </a:r>
+            <a:r>
+              <a:rPr sz="900" b="0" dirty="0" err="1">
+                <a:solidFill>
+                  <a:srgbClr val="CDD6F4"/>
+                </a:solidFill>
+              </a:rPr>
+              <a:t>파일</a:t>
+            </a:r>
+            <a:r>
+              <a:rPr sz="900" b="0" dirty="0">
+                <a:solidFill>
+                  <a:srgbClr val="CDD6F4"/>
+                </a:solidFill>
+              </a:rPr>
+              <a:t> </a:t>
+            </a:r>
+            <a:r>
+              <a:rPr sz="900" b="0" dirty="0" err="1">
+                <a:solidFill>
+                  <a:srgbClr val="CDD6F4"/>
+                </a:solidFill>
+              </a:rPr>
+              <a:t>지정</a:t>
+            </a:r>
+            <a:endParaRPr sz="900" b="0" dirty="0">
+              <a:solidFill>
+                <a:srgbClr val="CDD6F4"/>
+              </a:solidFill>
+            </a:endParaRPr>
           </a:p>
         </p:txBody>
       </p:sp>
@@ -10498,6 +10723,7 @@
           <a:lstStyle/>
           <a:p>
             <a:pPr algn="ctr"/>
+            <a:endParaRPr/>
           </a:p>
         </p:txBody>
       </p:sp>
@@ -10541,6 +10767,7 @@
           <a:lstStyle/>
           <a:p>
             <a:pPr algn="ctr"/>
+            <a:endParaRPr/>
           </a:p>
         </p:txBody>
       </p:sp>
@@ -10553,7 +10780,7 @@
         <p:spPr>
           <a:xfrm>
             <a:off x="9098280" y="3794759"/>
-            <a:ext cx="2468880" cy="256032"/>
+            <a:ext cx="2468880" cy="276999"/>
           </a:xfrm>
           <a:prstGeom prst="rect">
             <a:avLst/>
@@ -10568,11 +10795,7 @@
           <a:p>
             <a:pPr algn="l"/>
             <a:r>
-              <a:rPr sz="1200" b="1">
-                <a:solidFill>
-                  <a:srgbClr val="FFFFFF"/>
-                </a:solidFill>
-              </a:rPr>
+              <a:rPr sz="1200" b="1"/>
               <a:t>§7</a:t>
             </a:r>
           </a:p>
@@ -10636,14 +10859,155 @@
           <a:p>
             <a:pPr algn="l"/>
             <a:r>
-              <a:rPr sz="900" b="0">
+              <a:rPr sz="900" b="0" dirty="0">
                 <a:solidFill>
                   <a:srgbClr val="CDD6F4"/>
                 </a:solidFill>
               </a:rPr>
-              <a:t>trial 평균·전체 소요 시간 집계
-다음 탐색 epoch·trial 수 결정에 활용</a:t>
-            </a:r>
+              <a:t>trial </a:t>
+            </a:r>
+            <a:r>
+              <a:rPr sz="900" b="0" dirty="0" err="1">
+                <a:solidFill>
+                  <a:srgbClr val="CDD6F4"/>
+                </a:solidFill>
+              </a:rPr>
+              <a:t>평균·전체</a:t>
+            </a:r>
+            <a:r>
+              <a:rPr sz="900" b="0" dirty="0">
+                <a:solidFill>
+                  <a:srgbClr val="CDD6F4"/>
+                </a:solidFill>
+              </a:rPr>
+              <a:t> </a:t>
+            </a:r>
+            <a:r>
+              <a:rPr sz="900" b="0" dirty="0" err="1">
+                <a:solidFill>
+                  <a:srgbClr val="CDD6F4"/>
+                </a:solidFill>
+              </a:rPr>
+              <a:t>소요</a:t>
+            </a:r>
+            <a:r>
+              <a:rPr sz="900" b="0" dirty="0">
+                <a:solidFill>
+                  <a:srgbClr val="CDD6F4"/>
+                </a:solidFill>
+              </a:rPr>
+              <a:t> </a:t>
+            </a:r>
+            <a:r>
+              <a:rPr sz="900" b="0" dirty="0" err="1">
+                <a:solidFill>
+                  <a:srgbClr val="CDD6F4"/>
+                </a:solidFill>
+              </a:rPr>
+              <a:t>시간</a:t>
+            </a:r>
+            <a:r>
+              <a:rPr sz="900" b="0" dirty="0">
+                <a:solidFill>
+                  <a:srgbClr val="CDD6F4"/>
+                </a:solidFill>
+              </a:rPr>
+              <a:t> </a:t>
+            </a:r>
+            <a:r>
+              <a:rPr sz="900" b="0" dirty="0" err="1">
+                <a:solidFill>
+                  <a:srgbClr val="CDD6F4"/>
+                </a:solidFill>
+              </a:rPr>
+              <a:t>집계</a:t>
+            </a:r>
+            <a:r>
+              <a:rPr sz="900" b="0" dirty="0">
+                <a:solidFill>
+                  <a:srgbClr val="CDD6F4"/>
+                </a:solidFill>
+              </a:rPr>
+              <a:t>
+</a:t>
+            </a:r>
+            <a:r>
+              <a:rPr sz="900" b="0" dirty="0" err="1">
+                <a:solidFill>
+                  <a:srgbClr val="CDD6F4"/>
+                </a:solidFill>
+              </a:rPr>
+              <a:t>다음</a:t>
+            </a:r>
+            <a:r>
+              <a:rPr sz="900" b="0" dirty="0">
+                <a:solidFill>
+                  <a:srgbClr val="CDD6F4"/>
+                </a:solidFill>
+              </a:rPr>
+              <a:t> </a:t>
+            </a:r>
+            <a:r>
+              <a:rPr sz="900" b="0" dirty="0" err="1">
+                <a:solidFill>
+                  <a:srgbClr val="CDD6F4"/>
+                </a:solidFill>
+              </a:rPr>
+              <a:t>탐색</a:t>
+            </a:r>
+            <a:r>
+              <a:rPr sz="900" b="0" dirty="0">
+                <a:solidFill>
+                  <a:srgbClr val="CDD6F4"/>
+                </a:solidFill>
+              </a:rPr>
+              <a:t> </a:t>
+            </a:r>
+            <a:r>
+              <a:rPr sz="900" b="0" dirty="0" err="1">
+                <a:solidFill>
+                  <a:srgbClr val="CDD6F4"/>
+                </a:solidFill>
+              </a:rPr>
+              <a:t>epoch·trial</a:t>
+            </a:r>
+            <a:r>
+              <a:rPr sz="900" b="0" dirty="0">
+                <a:solidFill>
+                  <a:srgbClr val="CDD6F4"/>
+                </a:solidFill>
+              </a:rPr>
+              <a:t> 수 </a:t>
+            </a:r>
+            <a:r>
+              <a:rPr sz="900" b="0" dirty="0" err="1">
+                <a:solidFill>
+                  <a:srgbClr val="CDD6F4"/>
+                </a:solidFill>
+              </a:rPr>
+              <a:t>결정에</a:t>
+            </a:r>
+            <a:r>
+              <a:rPr sz="900" b="0" dirty="0">
+                <a:solidFill>
+                  <a:srgbClr val="CDD6F4"/>
+                </a:solidFill>
+              </a:rPr>
+              <a:t> </a:t>
+            </a:r>
+            <a:r>
+              <a:rPr sz="900" b="0" dirty="0" err="1">
+                <a:solidFill>
+                  <a:srgbClr val="CDD6F4"/>
+                </a:solidFill>
+              </a:rPr>
+              <a:t>활용</a:t>
+            </a:r>
+            <a:endParaRPr sz="900" b="0" dirty="0">
+              <a:solidFill>
+                <a:srgbClr val="CDD6F4"/>
+              </a:solidFill>
+            </a:endParaRPr>
           </a:p>
         </p:txBody>
       </p:sp>
@@ -10656,7 +11020,7 @@
 </file>
 
 <file path=ppt/slides/slide7.xml><?xml version="1.0" encoding="utf-8"?>
-<p:sld xmlns:a="http://schemas.openxmlformats.org/drawingml/2006/main" xmlns:p="http://schemas.openxmlformats.org/presentationml/2006/main" xmlns:r="http://schemas.openxmlformats.org/officeDocument/2006/relationships">
+<p:sld xmlns:a="http://schemas.openxmlformats.org/drawingml/2006/main" xmlns:r="http://schemas.openxmlformats.org/officeDocument/2006/relationships" xmlns:p="http://schemas.openxmlformats.org/presentationml/2006/main">
   <p:cSld>
     <p:bg>
       <p:bgPr>
@@ -10672,7 +11036,14 @@
         <p:cNvGrpSpPr/>
         <p:nvPr/>
       </p:nvGrpSpPr>
-      <p:grpSpPr/>
+      <p:grpSpPr>
+        <a:xfrm>
+          <a:off x="0" y="0"/>
+          <a:ext cx="0" cy="0"/>
+          <a:chOff x="0" y="0"/>
+          <a:chExt cx="0" cy="0"/>
+        </a:xfrm>
+      </p:grpSpPr>
       <p:sp>
         <p:nvSpPr>
           <p:cNvPr id="2" name="Rectangle 1"/>
@@ -10713,6 +11084,11 @@
           <a:lstStyle/>
           <a:p>
             <a:pPr algn="ctr"/>
+            <a:endParaRPr>
+              <a:solidFill>
+                <a:schemeClr val="tx1"/>
+              </a:solidFill>
+            </a:endParaRPr>
           </a:p>
         </p:txBody>
       </p:sp>
@@ -10725,7 +11101,7 @@
         <p:spPr>
           <a:xfrm>
             <a:off x="502920" y="292608"/>
-            <a:ext cx="1554480" cy="237744"/>
+            <a:ext cx="1554480" cy="246221"/>
           </a:xfrm>
           <a:prstGeom prst="rect">
             <a:avLst/>
@@ -10740,11 +11116,7 @@
           <a:p>
             <a:pPr algn="ctr"/>
             <a:r>
-              <a:rPr sz="1000" b="1">
-                <a:solidFill>
-                  <a:srgbClr val="FFFFFF"/>
-                </a:solidFill>
-              </a:rPr>
+              <a:rPr sz="1000" b="1" dirty="0"/>
               <a:t>RESULTS</a:t>
             </a:r>
           </a:p>
@@ -10824,6 +11196,7 @@
           <a:lstStyle/>
           <a:p>
             <a:pPr algn="ctr"/>
+            <a:endParaRPr/>
           </a:p>
         </p:txBody>
       </p:sp>
@@ -10901,6 +11274,7 @@
           <a:lstStyle/>
           <a:p>
             <a:pPr algn="ctr"/>
+            <a:endParaRPr/>
           </a:p>
         </p:txBody>
       </p:sp>
@@ -10913,7 +11287,7 @@
         <p:spPr>
           <a:xfrm>
             <a:off x="530352" y="1499616"/>
-            <a:ext cx="1417320" cy="228600"/>
+            <a:ext cx="1417320" cy="261610"/>
           </a:xfrm>
           <a:prstGeom prst="rect">
             <a:avLst/>
@@ -10928,11 +11302,7 @@
           <a:p>
             <a:pPr algn="l"/>
             <a:r>
-              <a:rPr sz="1100" b="1">
-                <a:solidFill>
-                  <a:srgbClr val="FFFFFF"/>
-                </a:solidFill>
-              </a:rPr>
+              <a:rPr sz="1100" b="1"/>
               <a:t>컬럼</a:t>
             </a:r>
           </a:p>
@@ -10978,6 +11348,7 @@
           <a:lstStyle/>
           <a:p>
             <a:pPr algn="ctr"/>
+            <a:endParaRPr/>
           </a:p>
         </p:txBody>
       </p:sp>
@@ -10990,7 +11361,7 @@
         <p:spPr>
           <a:xfrm>
             <a:off x="2176272" y="1499616"/>
-            <a:ext cx="1325880" cy="228600"/>
+            <a:ext cx="1325880" cy="261610"/>
           </a:xfrm>
           <a:prstGeom prst="rect">
             <a:avLst/>
@@ -11005,11 +11376,7 @@
           <a:p>
             <a:pPr algn="l"/>
             <a:r>
-              <a:rPr sz="1100" b="1">
-                <a:solidFill>
-                  <a:srgbClr val="FFFFFF"/>
-                </a:solidFill>
-              </a:rPr>
+              <a:rPr sz="1100" b="1"/>
               <a:t>예시값</a:t>
             </a:r>
           </a:p>
@@ -11055,6 +11422,7 @@
           <a:lstStyle/>
           <a:p>
             <a:pPr algn="ctr"/>
+            <a:endParaRPr/>
           </a:p>
         </p:txBody>
       </p:sp>
@@ -11067,7 +11435,7 @@
         <p:spPr>
           <a:xfrm>
             <a:off x="3730752" y="1499616"/>
-            <a:ext cx="2606040" cy="228600"/>
+            <a:ext cx="2606040" cy="261610"/>
           </a:xfrm>
           <a:prstGeom prst="rect">
             <a:avLst/>
@@ -11082,11 +11450,7 @@
           <a:p>
             <a:pPr algn="l"/>
             <a:r>
-              <a:rPr sz="1100" b="1">
-                <a:solidFill>
-                  <a:srgbClr val="FFFFFF"/>
-                </a:solidFill>
-              </a:rPr>
+              <a:rPr sz="1100" b="1"/>
               <a:t>설명</a:t>
             </a:r>
           </a:p>
@@ -11132,6 +11496,7 @@
           <a:lstStyle/>
           <a:p>
             <a:pPr algn="ctr"/>
+            <a:endParaRPr/>
           </a:p>
         </p:txBody>
       </p:sp>
@@ -11209,6 +11574,7 @@
           <a:lstStyle/>
           <a:p>
             <a:pPr algn="ctr"/>
+            <a:endParaRPr/>
           </a:p>
         </p:txBody>
       </p:sp>
@@ -11286,6 +11652,7 @@
           <a:lstStyle/>
           <a:p>
             <a:pPr algn="ctr"/>
+            <a:endParaRPr/>
           </a:p>
         </p:txBody>
       </p:sp>
@@ -11363,6 +11730,7 @@
           <a:lstStyle/>
           <a:p>
             <a:pPr algn="ctr"/>
+            <a:endParaRPr/>
           </a:p>
         </p:txBody>
       </p:sp>
@@ -11440,6 +11808,7 @@
           <a:lstStyle/>
           <a:p>
             <a:pPr algn="ctr"/>
+            <a:endParaRPr/>
           </a:p>
         </p:txBody>
       </p:sp>
@@ -11517,6 +11886,7 @@
           <a:lstStyle/>
           <a:p>
             <a:pPr algn="ctr"/>
+            <a:endParaRPr/>
           </a:p>
         </p:txBody>
       </p:sp>
@@ -11594,6 +11964,7 @@
           <a:lstStyle/>
           <a:p>
             <a:pPr algn="ctr"/>
+            <a:endParaRPr/>
           </a:p>
         </p:txBody>
       </p:sp>
@@ -11671,6 +12042,7 @@
           <a:lstStyle/>
           <a:p>
             <a:pPr algn="ctr"/>
+            <a:endParaRPr/>
           </a:p>
         </p:txBody>
       </p:sp>
@@ -11748,6 +12120,7 @@
           <a:lstStyle/>
           <a:p>
             <a:pPr algn="ctr"/>
+            <a:endParaRPr/>
           </a:p>
         </p:txBody>
       </p:sp>
@@ -11825,6 +12198,7 @@
           <a:lstStyle/>
           <a:p>
             <a:pPr algn="ctr"/>
+            <a:endParaRPr/>
           </a:p>
         </p:txBody>
       </p:sp>
@@ -11902,6 +12276,7 @@
           <a:lstStyle/>
           <a:p>
             <a:pPr algn="ctr"/>
+            <a:endParaRPr/>
           </a:p>
         </p:txBody>
       </p:sp>
@@ -11979,6 +12354,7 @@
           <a:lstStyle/>
           <a:p>
             <a:pPr algn="ctr"/>
+            <a:endParaRPr/>
           </a:p>
         </p:txBody>
       </p:sp>
@@ -12056,6 +12432,7 @@
           <a:lstStyle/>
           <a:p>
             <a:pPr algn="ctr"/>
+            <a:endParaRPr/>
           </a:p>
         </p:txBody>
       </p:sp>
@@ -12133,6 +12510,7 @@
           <a:lstStyle/>
           <a:p>
             <a:pPr algn="ctr"/>
+            <a:endParaRPr/>
           </a:p>
         </p:txBody>
       </p:sp>
@@ -12210,6 +12588,7 @@
           <a:lstStyle/>
           <a:p>
             <a:pPr algn="ctr"/>
+            <a:endParaRPr/>
           </a:p>
         </p:txBody>
       </p:sp>
@@ -12287,6 +12666,7 @@
           <a:lstStyle/>
           <a:p>
             <a:pPr algn="ctr"/>
+            <a:endParaRPr/>
           </a:p>
         </p:txBody>
       </p:sp>
@@ -12364,6 +12744,7 @@
           <a:lstStyle/>
           <a:p>
             <a:pPr algn="ctr"/>
+            <a:endParaRPr/>
           </a:p>
         </p:txBody>
       </p:sp>
@@ -12441,6 +12822,7 @@
           <a:lstStyle/>
           <a:p>
             <a:pPr algn="ctr"/>
+            <a:endParaRPr/>
           </a:p>
         </p:txBody>
       </p:sp>
@@ -12518,6 +12900,7 @@
           <a:lstStyle/>
           <a:p>
             <a:pPr algn="ctr"/>
+            <a:endParaRPr/>
           </a:p>
         </p:txBody>
       </p:sp>
@@ -12595,6 +12978,7 @@
           <a:lstStyle/>
           <a:p>
             <a:pPr algn="ctr"/>
+            <a:endParaRPr/>
           </a:p>
         </p:txBody>
       </p:sp>
@@ -12672,6 +13056,7 @@
           <a:lstStyle/>
           <a:p>
             <a:pPr algn="ctr"/>
+            <a:endParaRPr/>
           </a:p>
         </p:txBody>
       </p:sp>
@@ -12749,6 +13134,7 @@
           <a:lstStyle/>
           <a:p>
             <a:pPr algn="ctr"/>
+            <a:endParaRPr/>
           </a:p>
         </p:txBody>
       </p:sp>
@@ -12826,6 +13212,7 @@
           <a:lstStyle/>
           <a:p>
             <a:pPr algn="ctr"/>
+            <a:endParaRPr/>
           </a:p>
         </p:txBody>
       </p:sp>
@@ -12903,6 +13290,7 @@
           <a:lstStyle/>
           <a:p>
             <a:pPr algn="ctr"/>
+            <a:endParaRPr/>
           </a:p>
         </p:txBody>
       </p:sp>
@@ -12980,6 +13368,7 @@
           <a:lstStyle/>
           <a:p>
             <a:pPr algn="ctr"/>
+            <a:endParaRPr/>
           </a:p>
         </p:txBody>
       </p:sp>
@@ -13057,6 +13446,7 @@
           <a:lstStyle/>
           <a:p>
             <a:pPr algn="ctr"/>
+            <a:endParaRPr/>
           </a:p>
         </p:txBody>
       </p:sp>
@@ -13083,14 +13473,7 @@
           <a:lstStyle/>
           <a:p>
             <a:pPr algn="l"/>
-            <a:r>
-              <a:rPr sz="900" b="0">
-                <a:solidFill>
-                  <a:srgbClr val="CDD6F4"/>
-                </a:solidFill>
-              </a:rPr>
-              <a:t/>
-            </a:r>
+            <a:endParaRPr/>
           </a:p>
         </p:txBody>
       </p:sp>
@@ -13134,6 +13517,7 @@
           <a:lstStyle/>
           <a:p>
             <a:pPr algn="ctr"/>
+            <a:endParaRPr/>
           </a:p>
         </p:txBody>
       </p:sp>
@@ -13245,6 +13629,7 @@
           <a:lstStyle/>
           <a:p>
             <a:pPr algn="ctr"/>
+            <a:endParaRPr/>
           </a:p>
         </p:txBody>
       </p:sp>
@@ -13476,6 +13861,7 @@
           <a:lstStyle/>
           <a:p>
             <a:pPr algn="ctr"/>
+            <a:endParaRPr/>
           </a:p>
         </p:txBody>
       </p:sp>
@@ -13502,7 +13888,7 @@
           <a:lstStyle/>
           <a:p>
             <a:r>
-              <a:rPr sz="900">
+              <a:rPr sz="900" dirty="0">
                 <a:solidFill>
                   <a:srgbClr val="A6E3A1"/>
                 </a:solidFill>
@@ -13513,7 +13899,7 @@
           </a:p>
           <a:p>
             <a:r>
-              <a:rPr sz="900">
+              <a:rPr sz="900" dirty="0">
                 <a:solidFill>
                   <a:srgbClr val="A6E3A1"/>
                 </a:solidFill>
@@ -13524,7 +13910,7 @@
           </a:p>
           <a:p>
             <a:r>
-              <a:rPr sz="900">
+              <a:rPr sz="900" dirty="0">
                 <a:solidFill>
                   <a:srgbClr val="A6E3A1"/>
                 </a:solidFill>
@@ -13535,7 +13921,7 @@
           </a:p>
           <a:p>
             <a:r>
-              <a:rPr sz="900">
+              <a:rPr sz="900" dirty="0">
                 <a:solidFill>
                   <a:srgbClr val="A6E3A1"/>
                 </a:solidFill>
@@ -13546,7 +13932,7 @@
           </a:p>
           <a:p>
             <a:r>
-              <a:rPr sz="900">
+              <a:rPr sz="900" dirty="0">
                 <a:solidFill>
                   <a:srgbClr val="A6E3A1"/>
                 </a:solidFill>
@@ -13557,7 +13943,7 @@
           </a:p>
           <a:p>
             <a:r>
-              <a:rPr sz="900">
+              <a:rPr sz="900" dirty="0">
                 <a:solidFill>
                   <a:srgbClr val="A6E3A1"/>
                 </a:solidFill>
@@ -13568,7 +13954,7 @@
           </a:p>
           <a:p>
             <a:r>
-              <a:rPr sz="900">
+              <a:rPr sz="900" dirty="0">
                 <a:solidFill>
                   <a:srgbClr val="A6E3A1"/>
                 </a:solidFill>
@@ -13579,29 +13965,47 @@
           </a:p>
           <a:p>
             <a:r>
-              <a:rPr sz="900">
+              <a:rPr sz="900" dirty="0">
                 <a:solidFill>
                   <a:srgbClr val="A6E3A1"/>
                 </a:solidFill>
                 <a:latin typeface="Consolas"/>
               </a:rPr>
-              <a:t>  "elapsed_sec": 810.5,</a:t>
-            </a:r>
-          </a:p>
-          <a:p>
-            <a:r>
-              <a:rPr sz="900">
+              <a:t>  "</a:t>
+            </a:r>
+            <a:r>
+              <a:rPr sz="900" dirty="0" err="1">
                 <a:solidFill>
                   <a:srgbClr val="A6E3A1"/>
                 </a:solidFill>
                 <a:latin typeface="Consolas"/>
               </a:rPr>
+              <a:t>elapsed_sec</a:t>
+            </a:r>
+            <a:r>
+              <a:rPr sz="900" dirty="0">
+                <a:solidFill>
+                  <a:srgbClr val="A6E3A1"/>
+                </a:solidFill>
+                <a:latin typeface="Consolas"/>
+              </a:rPr>
+              <a:t>": 810.5,</a:t>
+            </a:r>
+          </a:p>
+          <a:p>
+            <a:r>
+              <a:rPr sz="900" dirty="0">
+                <a:solidFill>
+                  <a:srgbClr val="A6E3A1"/>
+                </a:solidFill>
+                <a:latin typeface="Consolas"/>
+              </a:rPr>
               <a:t>  "params": "{\"train.lr0\": 0.0001, ...}"</a:t>
             </a:r>
           </a:p>
           <a:p>
             <a:r>
-              <a:rPr sz="900">
+              <a:rPr sz="900" dirty="0">
                 <a:solidFill>
                   <a:srgbClr val="A6E3A1"/>
                 </a:solidFill>
@@ -13621,7 +14025,7 @@
 </file>
 
 <file path=ppt/slides/slide8.xml><?xml version="1.0" encoding="utf-8"?>
-<p:sld xmlns:a="http://schemas.openxmlformats.org/drawingml/2006/main" xmlns:p="http://schemas.openxmlformats.org/presentationml/2006/main" xmlns:r="http://schemas.openxmlformats.org/officeDocument/2006/relationships">
+<p:sld xmlns:a="http://schemas.openxmlformats.org/drawingml/2006/main" xmlns:r="http://schemas.openxmlformats.org/officeDocument/2006/relationships" xmlns:p="http://schemas.openxmlformats.org/presentationml/2006/main">
   <p:cSld>
     <p:bg>
       <p:bgPr>
@@ -13637,7 +14041,14 @@
         <p:cNvGrpSpPr/>
         <p:nvPr/>
       </p:nvGrpSpPr>
-      <p:grpSpPr/>
+      <p:grpSpPr>
+        <a:xfrm>
+          <a:off x="0" y="0"/>
+          <a:ext cx="0" cy="0"/>
+          <a:chOff x="0" y="0"/>
+          <a:chExt cx="0" cy="0"/>
+        </a:xfrm>
+      </p:grpSpPr>
       <p:sp>
         <p:nvSpPr>
           <p:cNvPr id="2" name="Rectangle 1"/>
@@ -13678,6 +14089,7 @@
           <a:lstStyle/>
           <a:p>
             <a:pPr algn="ctr"/>
+            <a:endParaRPr/>
           </a:p>
         </p:txBody>
       </p:sp>
@@ -13690,7 +14102,7 @@
         <p:spPr>
           <a:xfrm>
             <a:off x="502920" y="292608"/>
-            <a:ext cx="1554480" cy="237744"/>
+            <a:ext cx="1554480" cy="246221"/>
           </a:xfrm>
           <a:prstGeom prst="rect">
             <a:avLst/>
@@ -13705,11 +14117,7 @@
           <a:p>
             <a:pPr algn="ctr"/>
             <a:r>
-              <a:rPr sz="1000" b="1">
-                <a:solidFill>
-                  <a:srgbClr val="FFFFFF"/>
-                </a:solidFill>
-              </a:rPr>
+              <a:rPr sz="1000" b="1" dirty="0"/>
               <a:t>NEXT STEPS</a:t>
             </a:r>
           </a:p>
@@ -13789,6 +14197,7 @@
           <a:lstStyle/>
           <a:p>
             <a:pPr algn="ctr"/>
+            <a:endParaRPr/>
           </a:p>
         </p:txBody>
       </p:sp>
@@ -13866,6 +14275,7 @@
           <a:lstStyle/>
           <a:p>
             <a:pPr algn="ctr"/>
+            <a:endParaRPr/>
           </a:p>
         </p:txBody>
       </p:sp>
@@ -13909,6 +14319,7 @@
           <a:lstStyle/>
           <a:p>
             <a:pPr algn="ctr"/>
+            <a:endParaRPr/>
           </a:p>
         </p:txBody>
       </p:sp>
@@ -13921,7 +14332,7 @@
         <p:spPr>
           <a:xfrm>
             <a:off x="475488" y="1783080"/>
-            <a:ext cx="320040" cy="384048"/>
+            <a:ext cx="320040" cy="338554"/>
           </a:xfrm>
           <a:prstGeom prst="rect">
             <a:avLst/>
@@ -13936,11 +14347,7 @@
           <a:p>
             <a:pPr algn="ctr"/>
             <a:r>
-              <a:rPr sz="1600" b="1">
-                <a:solidFill>
-                  <a:srgbClr val="FFFFFF"/>
-                </a:solidFill>
-              </a:rPr>
+              <a:rPr sz="1600" b="1"/>
               <a:t>1</a:t>
             </a:r>
           </a:p>
@@ -14054,6 +14461,7 @@
           <a:lstStyle/>
           <a:p>
             <a:pPr algn="ctr"/>
+            <a:endParaRPr/>
           </a:p>
         </p:txBody>
       </p:sp>
@@ -14097,6 +14505,7 @@
           <a:lstStyle/>
           <a:p>
             <a:pPr algn="ctr"/>
+            <a:endParaRPr/>
           </a:p>
         </p:txBody>
       </p:sp>
@@ -14109,7 +14518,7 @@
         <p:spPr>
           <a:xfrm>
             <a:off x="475488" y="2862072"/>
-            <a:ext cx="320040" cy="384048"/>
+            <a:ext cx="320040" cy="338554"/>
           </a:xfrm>
           <a:prstGeom prst="rect">
             <a:avLst/>
@@ -14124,11 +14533,7 @@
           <a:p>
             <a:pPr algn="ctr"/>
             <a:r>
-              <a:rPr sz="1600" b="1">
-                <a:solidFill>
-                  <a:srgbClr val="FFFFFF"/>
-                </a:solidFill>
-              </a:rPr>
+              <a:rPr sz="1600" b="1"/>
               <a:t>2</a:t>
             </a:r>
           </a:p>
@@ -14242,6 +14647,7 @@
           <a:lstStyle/>
           <a:p>
             <a:pPr algn="ctr"/>
+            <a:endParaRPr/>
           </a:p>
         </p:txBody>
       </p:sp>
@@ -14285,6 +14691,7 @@
           <a:lstStyle/>
           <a:p>
             <a:pPr algn="ctr"/>
+            <a:endParaRPr/>
           </a:p>
         </p:txBody>
       </p:sp>
@@ -14297,7 +14704,7 @@
         <p:spPr>
           <a:xfrm>
             <a:off x="475488" y="3941063"/>
-            <a:ext cx="320040" cy="384048"/>
+            <a:ext cx="320040" cy="338554"/>
           </a:xfrm>
           <a:prstGeom prst="rect">
             <a:avLst/>
@@ -14312,11 +14719,7 @@
           <a:p>
             <a:pPr algn="ctr"/>
             <a:r>
-              <a:rPr sz="1600" b="1">
-                <a:solidFill>
-                  <a:srgbClr val="FFFFFF"/>
-                </a:solidFill>
-              </a:rPr>
+              <a:rPr sz="1600" b="1"/>
               <a:t>3</a:t>
             </a:r>
           </a:p>
@@ -14430,6 +14833,7 @@
           <a:lstStyle/>
           <a:p>
             <a:pPr algn="ctr"/>
+            <a:endParaRPr/>
           </a:p>
         </p:txBody>
       </p:sp>
@@ -14473,6 +14877,7 @@
           <a:lstStyle/>
           <a:p>
             <a:pPr algn="ctr"/>
+            <a:endParaRPr/>
           </a:p>
         </p:txBody>
       </p:sp>
@@ -14485,7 +14890,7 @@
         <p:spPr>
           <a:xfrm>
             <a:off x="475488" y="5020055"/>
-            <a:ext cx="320040" cy="384048"/>
+            <a:ext cx="320040" cy="338554"/>
           </a:xfrm>
           <a:prstGeom prst="rect">
             <a:avLst/>
@@ -14500,11 +14905,7 @@
           <a:p>
             <a:pPr algn="ctr"/>
             <a:r>
-              <a:rPr sz="1600" b="1">
-                <a:solidFill>
-                  <a:srgbClr val="FFFFFF"/>
-                </a:solidFill>
-              </a:rPr>
+              <a:rPr sz="1600" b="1"/>
               <a:t>4</a:t>
             </a:r>
           </a:p>
@@ -14652,6 +15053,7 @@
           <a:lstStyle/>
           <a:p>
             <a:pPr algn="ctr"/>
+            <a:endParaRPr/>
           </a:p>
         </p:txBody>
       </p:sp>
@@ -14695,6 +15097,7 @@
           <a:lstStyle/>
           <a:p>
             <a:pPr algn="ctr"/>
+            <a:endParaRPr/>
           </a:p>
         </p:txBody>
       </p:sp>
@@ -14807,6 +15210,7 @@
           <a:lstStyle/>
           <a:p>
             <a:pPr algn="ctr"/>
+            <a:endParaRPr/>
           </a:p>
         </p:txBody>
       </p:sp>
@@ -14850,6 +15254,7 @@
           <a:lstStyle/>
           <a:p>
             <a:pPr algn="ctr"/>
+            <a:endParaRPr/>
           </a:p>
         </p:txBody>
       </p:sp>
@@ -14962,6 +15367,7 @@
           <a:lstStyle/>
           <a:p>
             <a:pPr algn="ctr"/>
+            <a:endParaRPr/>
           </a:p>
         </p:txBody>
       </p:sp>
@@ -15005,6 +15411,7 @@
           <a:lstStyle/>
           <a:p>
             <a:pPr algn="ctr"/>
+            <a:endParaRPr/>
           </a:p>
         </p:txBody>
       </p:sp>
@@ -15066,14 +15473,147 @@
           <a:p>
             <a:pPr algn="l"/>
             <a:r>
-              <a:rPr sz="1000" b="0">
+              <a:rPr sz="1000" b="0" dirty="0" err="1">
                 <a:solidFill>
                   <a:srgbClr val="CDD6F4"/>
                 </a:solidFill>
               </a:rPr>
-              <a:t>결과 분포 확인 후 YAML 파일 범위를 best 근방으로 좁혀
-새 HPO_RUN_NAME으로 재탐색</a:t>
-            </a:r>
+              <a:t>결과</a:t>
+            </a:r>
+            <a:r>
+              <a:rPr sz="1000" b="0" dirty="0">
+                <a:solidFill>
+                  <a:srgbClr val="CDD6F4"/>
+                </a:solidFill>
+              </a:rPr>
+              <a:t> </a:t>
+            </a:r>
+            <a:r>
+              <a:rPr sz="1000" b="0" dirty="0" err="1">
+                <a:solidFill>
+                  <a:srgbClr val="CDD6F4"/>
+                </a:solidFill>
+              </a:rPr>
+              <a:t>분포</a:t>
+            </a:r>
+            <a:r>
+              <a:rPr sz="1000" b="0" dirty="0">
+                <a:solidFill>
+                  <a:srgbClr val="CDD6F4"/>
+                </a:solidFill>
+              </a:rPr>
+              <a:t> </a:t>
+            </a:r>
+            <a:r>
+              <a:rPr sz="1000" b="0" dirty="0" err="1">
+                <a:solidFill>
+                  <a:srgbClr val="CDD6F4"/>
+                </a:solidFill>
+              </a:rPr>
+              <a:t>확인</a:t>
+            </a:r>
+            <a:r>
+              <a:rPr sz="1000" b="0" dirty="0">
+                <a:solidFill>
+                  <a:srgbClr val="CDD6F4"/>
+                </a:solidFill>
+              </a:rPr>
+              <a:t> 후 YAML </a:t>
+            </a:r>
+            <a:r>
+              <a:rPr sz="1000" b="0" dirty="0" err="1">
+                <a:solidFill>
+                  <a:srgbClr val="CDD6F4"/>
+                </a:solidFill>
+              </a:rPr>
+              <a:t>파일</a:t>
+            </a:r>
+            <a:r>
+              <a:rPr sz="1000" b="0" dirty="0">
+                <a:solidFill>
+                  <a:srgbClr val="CDD6F4"/>
+                </a:solidFill>
+              </a:rPr>
+              <a:t> </a:t>
+            </a:r>
+            <a:r>
+              <a:rPr sz="1000" b="0" dirty="0" err="1">
+                <a:solidFill>
+                  <a:srgbClr val="CDD6F4"/>
+                </a:solidFill>
+              </a:rPr>
+              <a:t>범위를</a:t>
+            </a:r>
+            <a:r>
+              <a:rPr sz="1000" b="0" dirty="0">
+                <a:solidFill>
+                  <a:srgbClr val="CDD6F4"/>
+                </a:solidFill>
+              </a:rPr>
+              <a:t> best </a:t>
+            </a:r>
+            <a:r>
+              <a:rPr sz="1000" b="0" dirty="0" err="1">
+                <a:solidFill>
+                  <a:srgbClr val="CDD6F4"/>
+                </a:solidFill>
+              </a:rPr>
+              <a:t>근방으로</a:t>
+            </a:r>
+            <a:r>
+              <a:rPr sz="1000" b="0" dirty="0">
+                <a:solidFill>
+                  <a:srgbClr val="CDD6F4"/>
+                </a:solidFill>
+              </a:rPr>
+              <a:t> </a:t>
+            </a:r>
+            <a:r>
+              <a:rPr sz="1000" b="0" dirty="0" err="1">
+                <a:solidFill>
+                  <a:srgbClr val="CDD6F4"/>
+                </a:solidFill>
+              </a:rPr>
+              <a:t>좁혀</a:t>
+            </a:r>
+            <a:r>
+              <a:rPr sz="1000" b="0" dirty="0">
+                <a:solidFill>
+                  <a:srgbClr val="CDD6F4"/>
+                </a:solidFill>
+              </a:rPr>
+              <a:t>
+새 </a:t>
+            </a:r>
+            <a:r>
+              <a:rPr sz="1000" b="0" dirty="0" err="1">
+                <a:solidFill>
+                  <a:srgbClr val="CDD6F4"/>
+                </a:solidFill>
+              </a:rPr>
+              <a:t>HPO_RUN_NAME으로</a:t>
+            </a:r>
+            <a:r>
+              <a:rPr sz="1000" b="0" dirty="0">
+                <a:solidFill>
+                  <a:srgbClr val="CDD6F4"/>
+                </a:solidFill>
+              </a:rPr>
+              <a:t> </a:t>
+            </a:r>
+            <a:r>
+              <a:rPr sz="1000" b="0" dirty="0" err="1">
+                <a:solidFill>
+                  <a:srgbClr val="CDD6F4"/>
+                </a:solidFill>
+              </a:rPr>
+              <a:t>재탐색</a:t>
+            </a:r>
+            <a:endParaRPr sz="1000" b="0" dirty="0">
+              <a:solidFill>
+                <a:srgbClr val="CDD6F4"/>
+              </a:solidFill>
+            </a:endParaRPr>
           </a:p>
         </p:txBody>
       </p:sp>
@@ -15117,6 +15657,7 @@
           <a:lstStyle/>
           <a:p>
             <a:pPr algn="ctr"/>
+            <a:endParaRPr/>
           </a:p>
         </p:txBody>
       </p:sp>
@@ -15160,6 +15701,7 @@
           <a:lstStyle/>
           <a:p>
             <a:pPr algn="ctr"/>
+            <a:endParaRPr/>
           </a:p>
         </p:txBody>
       </p:sp>
@@ -15221,14 +15763,131 @@
           <a:p>
             <a:pPr algn="l"/>
             <a:r>
-              <a:rPr sz="1000" b="0">
+              <a:rPr sz="1000" b="0" dirty="0" err="1">
                 <a:solidFill>
                   <a:srgbClr val="CDD6F4"/>
                 </a:solidFill>
               </a:rPr>
-              <a:t>메인 노트북(pipeline_tutorial_colab.ipynb)에서
-s2_best_config.yaml 적용 후 mAP 최종 확인</a:t>
-            </a:r>
+              <a:t>메인</a:t>
+            </a:r>
+            <a:r>
+              <a:rPr sz="1000" b="0" dirty="0">
+                <a:solidFill>
+                  <a:srgbClr val="CDD6F4"/>
+                </a:solidFill>
+              </a:rPr>
+              <a:t> </a:t>
+            </a:r>
+            <a:r>
+              <a:rPr sz="1000" b="0" dirty="0" err="1">
+                <a:solidFill>
+                  <a:srgbClr val="CDD6F4"/>
+                </a:solidFill>
+              </a:rPr>
+              <a:t>노트북</a:t>
+            </a:r>
+            <a:r>
+              <a:rPr sz="1000" b="0" dirty="0">
+                <a:solidFill>
+                  <a:srgbClr val="CDD6F4"/>
+                </a:solidFill>
+              </a:rPr>
+              <a:t>(</a:t>
+            </a:r>
+            <a:r>
+              <a:rPr sz="1000" b="0" dirty="0" err="1">
+                <a:solidFill>
+                  <a:srgbClr val="CDD6F4"/>
+                </a:solidFill>
+              </a:rPr>
+              <a:t>pipeline_tutorial_colab.ipynb</a:t>
+            </a:r>
+            <a:r>
+              <a:rPr sz="1000" b="0" dirty="0">
+                <a:solidFill>
+                  <a:srgbClr val="CDD6F4"/>
+                </a:solidFill>
+              </a:rPr>
+              <a:t>)</a:t>
+            </a:r>
+            <a:r>
+              <a:rPr sz="1000" b="0" dirty="0" err="1">
+                <a:solidFill>
+                  <a:srgbClr val="CDD6F4"/>
+                </a:solidFill>
+              </a:rPr>
+              <a:t>에서</a:t>
+            </a:r>
+            <a:r>
+              <a:rPr sz="1000" b="0" dirty="0">
+                <a:solidFill>
+                  <a:srgbClr val="CDD6F4"/>
+                </a:solidFill>
+              </a:rPr>
+              <a:t>
+s2_best_config.yaml </a:t>
+            </a:r>
+            <a:r>
+              <a:rPr sz="1000" b="0" dirty="0" err="1">
+                <a:solidFill>
+                  <a:srgbClr val="CDD6F4"/>
+                </a:solidFill>
+              </a:rPr>
+              <a:t>적용</a:t>
+            </a:r>
+            <a:r>
+              <a:rPr sz="1000" b="0" dirty="0">
+                <a:solidFill>
+                  <a:srgbClr val="CDD6F4"/>
+                </a:solidFill>
+              </a:rPr>
+              <a:t> 후 </a:t>
+            </a:r>
+            <a:r>
+              <a:rPr sz="1000" b="0" dirty="0" err="1">
+                <a:solidFill>
+                  <a:srgbClr val="CDD6F4"/>
+                </a:solidFill>
+              </a:rPr>
+              <a:t>mAP</a:t>
+            </a:r>
+            <a:r>
+              <a:rPr sz="1000" b="0" dirty="0">
+                <a:solidFill>
+                  <a:srgbClr val="CDD6F4"/>
+                </a:solidFill>
+              </a:rPr>
+              <a:t> </a:t>
+            </a:r>
+            <a:r>
+              <a:rPr sz="1000" b="0" dirty="0" err="1">
+                <a:solidFill>
+                  <a:srgbClr val="CDD6F4"/>
+                </a:solidFill>
+              </a:rPr>
+              <a:t>최종</a:t>
+            </a:r>
+            <a:r>
+              <a:rPr sz="1000" b="0" dirty="0">
+                <a:solidFill>
+                  <a:srgbClr val="CDD6F4"/>
+                </a:solidFill>
+              </a:rPr>
+              <a:t> </a:t>
+            </a:r>
+            <a:r>
+              <a:rPr sz="1000" b="0" dirty="0" err="1">
+                <a:solidFill>
+                  <a:srgbClr val="CDD6F4"/>
+                </a:solidFill>
+              </a:rPr>
+              <a:t>확인</a:t>
+            </a:r>
+            <a:endParaRPr sz="1000" b="0" dirty="0">
+              <a:solidFill>
+                <a:srgbClr val="CDD6F4"/>
+              </a:solidFill>
+            </a:endParaRPr>
           </a:p>
         </p:txBody>
       </p:sp>
